--- a/content/iitb/cover.pptx
+++ b/content/iitb/cover.pptx
@@ -4,8 +4,12 @@
   <p:sldMasterIdLst>
     <p:sldMasterId id="2147483660" r:id="rId1"/>
   </p:sldMasterIdLst>
+  <p:notesMasterIdLst>
+    <p:notesMasterId r:id="rId4"/>
+  </p:notesMasterIdLst>
   <p:sldIdLst>
     <p:sldId id="256" r:id="rId2"/>
+    <p:sldId id="257" r:id="rId3"/>
   </p:sldIdLst>
   <p:sldSz cx="9144000" cy="6400800"/>
   <p:notesSz cx="6858000" cy="9144000"/>
@@ -104,7 +108,445 @@
       </a:defRPr>
     </a:lvl9pPr>
   </p:defaultTextStyle>
+  <p:extLst>
+    <p:ext uri="{EFAFB233-063F-42B5-8137-9DF3F51BA10A}">
+      <p15:sldGuideLst xmlns:p15="http://schemas.microsoft.com/office/powerpoint/2012/main"/>
+    </p:ext>
+  </p:extLst>
 </p:presentation>
+</file>
+
+<file path=ppt/notesMasters/notesMaster1.xml><?xml version="1.0" encoding="utf-8"?>
+<p:notesMaster xmlns:a="http://schemas.openxmlformats.org/drawingml/2006/main" xmlns:r="http://schemas.openxmlformats.org/officeDocument/2006/relationships" xmlns:p="http://schemas.openxmlformats.org/presentationml/2006/main">
+  <p:cSld>
+    <p:bg>
+      <p:bgRef idx="1001">
+        <a:schemeClr val="bg1"/>
+      </p:bgRef>
+    </p:bg>
+    <p:spTree>
+      <p:nvGrpSpPr>
+        <p:cNvPr id="1" name=""/>
+        <p:cNvGrpSpPr/>
+        <p:nvPr/>
+      </p:nvGrpSpPr>
+      <p:grpSpPr>
+        <a:xfrm>
+          <a:off x="0" y="0"/>
+          <a:ext cx="0" cy="0"/>
+          <a:chOff x="0" y="0"/>
+          <a:chExt cx="0" cy="0"/>
+        </a:xfrm>
+      </p:grpSpPr>
+      <p:sp>
+        <p:nvSpPr>
+          <p:cNvPr id="2" name="Header Placeholder 1"/>
+          <p:cNvSpPr>
+            <a:spLocks noGrp="1"/>
+          </p:cNvSpPr>
+          <p:nvPr>
+            <p:ph type="hdr" sz="quarter"/>
+          </p:nvPr>
+        </p:nvSpPr>
+        <p:spPr>
+          <a:xfrm>
+            <a:off x="0" y="0"/>
+            <a:ext cx="2971800" cy="458788"/>
+          </a:xfrm>
+          <a:prstGeom prst="rect">
+            <a:avLst/>
+          </a:prstGeom>
+        </p:spPr>
+        <p:txBody>
+          <a:bodyPr vert="horz" lIns="91440" tIns="45720" rIns="91440" bIns="45720" rtlCol="0"/>
+          <a:lstStyle>
+            <a:lvl1pPr algn="l">
+              <a:defRPr sz="1200"/>
+            </a:lvl1pPr>
+          </a:lstStyle>
+          <a:p>
+            <a:endParaRPr lang="en-US"/>
+          </a:p>
+        </p:txBody>
+      </p:sp>
+      <p:sp>
+        <p:nvSpPr>
+          <p:cNvPr id="3" name="Date Placeholder 2"/>
+          <p:cNvSpPr>
+            <a:spLocks noGrp="1"/>
+          </p:cNvSpPr>
+          <p:nvPr>
+            <p:ph type="dt" idx="1"/>
+          </p:nvPr>
+        </p:nvSpPr>
+        <p:spPr>
+          <a:xfrm>
+            <a:off x="3884613" y="0"/>
+            <a:ext cx="2971800" cy="458788"/>
+          </a:xfrm>
+          <a:prstGeom prst="rect">
+            <a:avLst/>
+          </a:prstGeom>
+        </p:spPr>
+        <p:txBody>
+          <a:bodyPr vert="horz" lIns="91440" tIns="45720" rIns="91440" bIns="45720" rtlCol="0"/>
+          <a:lstStyle>
+            <a:lvl1pPr algn="r">
+              <a:defRPr sz="1200"/>
+            </a:lvl1pPr>
+          </a:lstStyle>
+          <a:p>
+            <a:fld id="{4576D62F-294C-E64A-BA14-F14BBB4E7C2F}" type="datetimeFigureOut">
+              <a:rPr lang="en-US" smtClean="0"/>
+              <a:t>4/12/25</a:t>
+            </a:fld>
+            <a:endParaRPr lang="en-US"/>
+          </a:p>
+        </p:txBody>
+      </p:sp>
+      <p:sp>
+        <p:nvSpPr>
+          <p:cNvPr id="4" name="Slide Image Placeholder 3"/>
+          <p:cNvSpPr>
+            <a:spLocks noGrp="1" noRot="1" noChangeAspect="1"/>
+          </p:cNvSpPr>
+          <p:nvPr>
+            <p:ph type="sldImg" idx="2"/>
+          </p:nvPr>
+        </p:nvSpPr>
+        <p:spPr>
+          <a:xfrm>
+            <a:off x="1223963" y="1143000"/>
+            <a:ext cx="4410075" cy="3086100"/>
+          </a:xfrm>
+          <a:prstGeom prst="rect">
+            <a:avLst/>
+          </a:prstGeom>
+          <a:noFill/>
+          <a:ln w="12700">
+            <a:solidFill>
+              <a:prstClr val="black"/>
+            </a:solidFill>
+          </a:ln>
+        </p:spPr>
+        <p:txBody>
+          <a:bodyPr vert="horz" lIns="91440" tIns="45720" rIns="91440" bIns="45720" rtlCol="0" anchor="ctr"/>
+          <a:lstStyle/>
+          <a:p>
+            <a:endParaRPr lang="en-US"/>
+          </a:p>
+        </p:txBody>
+      </p:sp>
+      <p:sp>
+        <p:nvSpPr>
+          <p:cNvPr id="5" name="Notes Placeholder 4"/>
+          <p:cNvSpPr>
+            <a:spLocks noGrp="1"/>
+          </p:cNvSpPr>
+          <p:nvPr>
+            <p:ph type="body" sz="quarter" idx="3"/>
+          </p:nvPr>
+        </p:nvSpPr>
+        <p:spPr>
+          <a:xfrm>
+            <a:off x="685800" y="4400550"/>
+            <a:ext cx="5486400" cy="3600450"/>
+          </a:xfrm>
+          <a:prstGeom prst="rect">
+            <a:avLst/>
+          </a:prstGeom>
+        </p:spPr>
+        <p:txBody>
+          <a:bodyPr vert="horz" lIns="91440" tIns="45720" rIns="91440" bIns="45720" rtlCol="0"/>
+          <a:lstStyle/>
+          <a:p>
+            <a:pPr lvl="0"/>
+            <a:r>
+              <a:rPr lang="en-US"/>
+              <a:t>Click to edit Master text styles</a:t>
+            </a:r>
+          </a:p>
+          <a:p>
+            <a:pPr lvl="1"/>
+            <a:r>
+              <a:rPr lang="en-US"/>
+              <a:t>Second level</a:t>
+            </a:r>
+          </a:p>
+          <a:p>
+            <a:pPr lvl="2"/>
+            <a:r>
+              <a:rPr lang="en-US"/>
+              <a:t>Third level</a:t>
+            </a:r>
+          </a:p>
+          <a:p>
+            <a:pPr lvl="3"/>
+            <a:r>
+              <a:rPr lang="en-US"/>
+              <a:t>Fourth level</a:t>
+            </a:r>
+          </a:p>
+          <a:p>
+            <a:pPr lvl="4"/>
+            <a:r>
+              <a:rPr lang="en-US"/>
+              <a:t>Fifth level</a:t>
+            </a:r>
+          </a:p>
+        </p:txBody>
+      </p:sp>
+      <p:sp>
+        <p:nvSpPr>
+          <p:cNvPr id="6" name="Footer Placeholder 5"/>
+          <p:cNvSpPr>
+            <a:spLocks noGrp="1"/>
+          </p:cNvSpPr>
+          <p:nvPr>
+            <p:ph type="ftr" sz="quarter" idx="4"/>
+          </p:nvPr>
+        </p:nvSpPr>
+        <p:spPr>
+          <a:xfrm>
+            <a:off x="0" y="8685213"/>
+            <a:ext cx="2971800" cy="458787"/>
+          </a:xfrm>
+          <a:prstGeom prst="rect">
+            <a:avLst/>
+          </a:prstGeom>
+        </p:spPr>
+        <p:txBody>
+          <a:bodyPr vert="horz" lIns="91440" tIns="45720" rIns="91440" bIns="45720" rtlCol="0" anchor="b"/>
+          <a:lstStyle>
+            <a:lvl1pPr algn="l">
+              <a:defRPr sz="1200"/>
+            </a:lvl1pPr>
+          </a:lstStyle>
+          <a:p>
+            <a:endParaRPr lang="en-US"/>
+          </a:p>
+        </p:txBody>
+      </p:sp>
+      <p:sp>
+        <p:nvSpPr>
+          <p:cNvPr id="7" name="Slide Number Placeholder 6"/>
+          <p:cNvSpPr>
+            <a:spLocks noGrp="1"/>
+          </p:cNvSpPr>
+          <p:nvPr>
+            <p:ph type="sldNum" sz="quarter" idx="5"/>
+          </p:nvPr>
+        </p:nvSpPr>
+        <p:spPr>
+          <a:xfrm>
+            <a:off x="3884613" y="8685213"/>
+            <a:ext cx="2971800" cy="458787"/>
+          </a:xfrm>
+          <a:prstGeom prst="rect">
+            <a:avLst/>
+          </a:prstGeom>
+        </p:spPr>
+        <p:txBody>
+          <a:bodyPr vert="horz" lIns="91440" tIns="45720" rIns="91440" bIns="45720" rtlCol="0" anchor="b"/>
+          <a:lstStyle>
+            <a:lvl1pPr algn="r">
+              <a:defRPr sz="1200"/>
+            </a:lvl1pPr>
+          </a:lstStyle>
+          <a:p>
+            <a:fld id="{A624094C-0284-4D41-AFC6-B2EE26AC05FE}" type="slidenum">
+              <a:rPr lang="en-US" smtClean="0"/>
+              <a:t>‹#›</a:t>
+            </a:fld>
+            <a:endParaRPr lang="en-US"/>
+          </a:p>
+        </p:txBody>
+      </p:sp>
+    </p:spTree>
+    <p:extLst>
+      <p:ext uri="{BB962C8B-B14F-4D97-AF65-F5344CB8AC3E}">
+        <p14:creationId xmlns:p14="http://schemas.microsoft.com/office/powerpoint/2010/main" val="2161091064"/>
+      </p:ext>
+    </p:extLst>
+  </p:cSld>
+  <p:clrMap bg1="lt1" tx1="dk1" bg2="lt2" tx2="dk2" accent1="accent1" accent2="accent2" accent3="accent3" accent4="accent4" accent5="accent5" accent6="accent6" hlink="hlink" folHlink="folHlink"/>
+  <p:notesStyle>
+    <a:lvl1pPr marL="0" algn="l" defTabSz="914400" rtl="0" eaLnBrk="1" latinLnBrk="0" hangingPunct="1">
+      <a:defRPr sz="1200" kern="1200">
+        <a:solidFill>
+          <a:schemeClr val="tx1"/>
+        </a:solidFill>
+        <a:latin typeface="+mn-lt"/>
+        <a:ea typeface="+mn-ea"/>
+        <a:cs typeface="+mn-cs"/>
+      </a:defRPr>
+    </a:lvl1pPr>
+    <a:lvl2pPr marL="457200" algn="l" defTabSz="914400" rtl="0" eaLnBrk="1" latinLnBrk="0" hangingPunct="1">
+      <a:defRPr sz="1200" kern="1200">
+        <a:solidFill>
+          <a:schemeClr val="tx1"/>
+        </a:solidFill>
+        <a:latin typeface="+mn-lt"/>
+        <a:ea typeface="+mn-ea"/>
+        <a:cs typeface="+mn-cs"/>
+      </a:defRPr>
+    </a:lvl2pPr>
+    <a:lvl3pPr marL="914400" algn="l" defTabSz="914400" rtl="0" eaLnBrk="1" latinLnBrk="0" hangingPunct="1">
+      <a:defRPr sz="1200" kern="1200">
+        <a:solidFill>
+          <a:schemeClr val="tx1"/>
+        </a:solidFill>
+        <a:latin typeface="+mn-lt"/>
+        <a:ea typeface="+mn-ea"/>
+        <a:cs typeface="+mn-cs"/>
+      </a:defRPr>
+    </a:lvl3pPr>
+    <a:lvl4pPr marL="1371600" algn="l" defTabSz="914400" rtl="0" eaLnBrk="1" latinLnBrk="0" hangingPunct="1">
+      <a:defRPr sz="1200" kern="1200">
+        <a:solidFill>
+          <a:schemeClr val="tx1"/>
+        </a:solidFill>
+        <a:latin typeface="+mn-lt"/>
+        <a:ea typeface="+mn-ea"/>
+        <a:cs typeface="+mn-cs"/>
+      </a:defRPr>
+    </a:lvl4pPr>
+    <a:lvl5pPr marL="1828800" algn="l" defTabSz="914400" rtl="0" eaLnBrk="1" latinLnBrk="0" hangingPunct="1">
+      <a:defRPr sz="1200" kern="1200">
+        <a:solidFill>
+          <a:schemeClr val="tx1"/>
+        </a:solidFill>
+        <a:latin typeface="+mn-lt"/>
+        <a:ea typeface="+mn-ea"/>
+        <a:cs typeface="+mn-cs"/>
+      </a:defRPr>
+    </a:lvl5pPr>
+    <a:lvl6pPr marL="2286000" algn="l" defTabSz="914400" rtl="0" eaLnBrk="1" latinLnBrk="0" hangingPunct="1">
+      <a:defRPr sz="1200" kern="1200">
+        <a:solidFill>
+          <a:schemeClr val="tx1"/>
+        </a:solidFill>
+        <a:latin typeface="+mn-lt"/>
+        <a:ea typeface="+mn-ea"/>
+        <a:cs typeface="+mn-cs"/>
+      </a:defRPr>
+    </a:lvl6pPr>
+    <a:lvl7pPr marL="2743200" algn="l" defTabSz="914400" rtl="0" eaLnBrk="1" latinLnBrk="0" hangingPunct="1">
+      <a:defRPr sz="1200" kern="1200">
+        <a:solidFill>
+          <a:schemeClr val="tx1"/>
+        </a:solidFill>
+        <a:latin typeface="+mn-lt"/>
+        <a:ea typeface="+mn-ea"/>
+        <a:cs typeface="+mn-cs"/>
+      </a:defRPr>
+    </a:lvl7pPr>
+    <a:lvl8pPr marL="3200400" algn="l" defTabSz="914400" rtl="0" eaLnBrk="1" latinLnBrk="0" hangingPunct="1">
+      <a:defRPr sz="1200" kern="1200">
+        <a:solidFill>
+          <a:schemeClr val="tx1"/>
+        </a:solidFill>
+        <a:latin typeface="+mn-lt"/>
+        <a:ea typeface="+mn-ea"/>
+        <a:cs typeface="+mn-cs"/>
+      </a:defRPr>
+    </a:lvl8pPr>
+    <a:lvl9pPr marL="3657600" algn="l" defTabSz="914400" rtl="0" eaLnBrk="1" latinLnBrk="0" hangingPunct="1">
+      <a:defRPr sz="1200" kern="1200">
+        <a:solidFill>
+          <a:schemeClr val="tx1"/>
+        </a:solidFill>
+        <a:latin typeface="+mn-lt"/>
+        <a:ea typeface="+mn-ea"/>
+        <a:cs typeface="+mn-cs"/>
+      </a:defRPr>
+    </a:lvl9pPr>
+  </p:notesStyle>
+</p:notesMaster>
+</file>
+
+<file path=ppt/notesSlides/notesSlide1.xml><?xml version="1.0" encoding="utf-8"?>
+<p:notes xmlns:a="http://schemas.openxmlformats.org/drawingml/2006/main" xmlns:r="http://schemas.openxmlformats.org/officeDocument/2006/relationships" xmlns:p="http://schemas.openxmlformats.org/presentationml/2006/main">
+  <p:cSld>
+    <p:spTree>
+      <p:nvGrpSpPr>
+        <p:cNvPr id="1" name=""/>
+        <p:cNvGrpSpPr/>
+        <p:nvPr/>
+      </p:nvGrpSpPr>
+      <p:grpSpPr>
+        <a:xfrm>
+          <a:off x="0" y="0"/>
+          <a:ext cx="0" cy="0"/>
+          <a:chOff x="0" y="0"/>
+          <a:chExt cx="0" cy="0"/>
+        </a:xfrm>
+      </p:grpSpPr>
+      <p:sp>
+        <p:nvSpPr>
+          <p:cNvPr id="2" name="Slide Image Placeholder 1"/>
+          <p:cNvSpPr>
+            <a:spLocks noGrp="1" noRot="1" noChangeAspect="1"/>
+          </p:cNvSpPr>
+          <p:nvPr>
+            <p:ph type="sldImg"/>
+          </p:nvPr>
+        </p:nvSpPr>
+        <p:spPr/>
+      </p:sp>
+      <p:sp>
+        <p:nvSpPr>
+          <p:cNvPr id="3" name="Notes Placeholder 2"/>
+          <p:cNvSpPr>
+            <a:spLocks noGrp="1"/>
+          </p:cNvSpPr>
+          <p:nvPr>
+            <p:ph type="body" idx="1"/>
+          </p:nvPr>
+        </p:nvSpPr>
+        <p:spPr/>
+        <p:txBody>
+          <a:bodyPr/>
+          <a:lstStyle/>
+          <a:p>
+            <a:endParaRPr lang="en-US" dirty="0"/>
+          </a:p>
+        </p:txBody>
+      </p:sp>
+      <p:sp>
+        <p:nvSpPr>
+          <p:cNvPr id="4" name="Slide Number Placeholder 3"/>
+          <p:cNvSpPr>
+            <a:spLocks noGrp="1"/>
+          </p:cNvSpPr>
+          <p:nvPr>
+            <p:ph type="sldNum" sz="quarter" idx="5"/>
+          </p:nvPr>
+        </p:nvSpPr>
+        <p:spPr/>
+        <p:txBody>
+          <a:bodyPr/>
+          <a:lstStyle/>
+          <a:p>
+            <a:fld id="{A624094C-0284-4D41-AFC6-B2EE26AC05FE}" type="slidenum">
+              <a:rPr lang="en-US" smtClean="0"/>
+              <a:t>2</a:t>
+            </a:fld>
+            <a:endParaRPr lang="en-US"/>
+          </a:p>
+        </p:txBody>
+      </p:sp>
+    </p:spTree>
+    <p:extLst>
+      <p:ext uri="{BB962C8B-B14F-4D97-AF65-F5344CB8AC3E}">
+        <p14:creationId xmlns:p14="http://schemas.microsoft.com/office/powerpoint/2010/main" val="1245274405"/>
+      </p:ext>
+    </p:extLst>
+  </p:cSld>
+  <p:clrMapOvr>
+    <a:masterClrMapping/>
+  </p:clrMapOvr>
+</p:notes>
 </file>
 
 <file path=ppt/slideLayouts/slideLayout1.xml><?xml version="1.0" encoding="utf-8"?>
@@ -238,7 +680,7 @@
           <a:p>
             <a:fld id="{70F94CF4-DC5B-F746-A6B2-66C89B28EAF6}" type="datetimeFigureOut">
               <a:rPr lang="en-US" smtClean="0"/>
-              <a:t>5/26/24</a:t>
+              <a:t>4/12/25</a:t>
             </a:fld>
             <a:endParaRPr lang="en-US"/>
           </a:p>
@@ -408,7 +850,7 @@
           <a:p>
             <a:fld id="{70F94CF4-DC5B-F746-A6B2-66C89B28EAF6}" type="datetimeFigureOut">
               <a:rPr lang="en-US" smtClean="0"/>
-              <a:t>5/26/24</a:t>
+              <a:t>4/12/25</a:t>
             </a:fld>
             <a:endParaRPr lang="en-US"/>
           </a:p>
@@ -588,7 +1030,7 @@
           <a:p>
             <a:fld id="{70F94CF4-DC5B-F746-A6B2-66C89B28EAF6}" type="datetimeFigureOut">
               <a:rPr lang="en-US" smtClean="0"/>
-              <a:t>5/26/24</a:t>
+              <a:t>4/12/25</a:t>
             </a:fld>
             <a:endParaRPr lang="en-US"/>
           </a:p>
@@ -758,7 +1200,7 @@
           <a:p>
             <a:fld id="{70F94CF4-DC5B-F746-A6B2-66C89B28EAF6}" type="datetimeFigureOut">
               <a:rPr lang="en-US" smtClean="0"/>
-              <a:t>5/26/24</a:t>
+              <a:t>4/12/25</a:t>
             </a:fld>
             <a:endParaRPr lang="en-US"/>
           </a:p>
@@ -1004,7 +1446,7 @@
           <a:p>
             <a:fld id="{70F94CF4-DC5B-F746-A6B2-66C89B28EAF6}" type="datetimeFigureOut">
               <a:rPr lang="en-US" smtClean="0"/>
-              <a:t>5/26/24</a:t>
+              <a:t>4/12/25</a:t>
             </a:fld>
             <a:endParaRPr lang="en-US"/>
           </a:p>
@@ -1236,7 +1678,7 @@
           <a:p>
             <a:fld id="{70F94CF4-DC5B-F746-A6B2-66C89B28EAF6}" type="datetimeFigureOut">
               <a:rPr lang="en-US" smtClean="0"/>
-              <a:t>5/26/24</a:t>
+              <a:t>4/12/25</a:t>
             </a:fld>
             <a:endParaRPr lang="en-US"/>
           </a:p>
@@ -1603,7 +2045,7 @@
           <a:p>
             <a:fld id="{70F94CF4-DC5B-F746-A6B2-66C89B28EAF6}" type="datetimeFigureOut">
               <a:rPr lang="en-US" smtClean="0"/>
-              <a:t>5/26/24</a:t>
+              <a:t>4/12/25</a:t>
             </a:fld>
             <a:endParaRPr lang="en-US"/>
           </a:p>
@@ -1721,7 +2163,7 @@
           <a:p>
             <a:fld id="{70F94CF4-DC5B-F746-A6B2-66C89B28EAF6}" type="datetimeFigureOut">
               <a:rPr lang="en-US" smtClean="0"/>
-              <a:t>5/26/24</a:t>
+              <a:t>4/12/25</a:t>
             </a:fld>
             <a:endParaRPr lang="en-US"/>
           </a:p>
@@ -1816,7 +2258,7 @@
           <a:p>
             <a:fld id="{70F94CF4-DC5B-F746-A6B2-66C89B28EAF6}" type="datetimeFigureOut">
               <a:rPr lang="en-US" smtClean="0"/>
-              <a:t>5/26/24</a:t>
+              <a:t>4/12/25</a:t>
             </a:fld>
             <a:endParaRPr lang="en-US"/>
           </a:p>
@@ -2093,7 +2535,7 @@
           <a:p>
             <a:fld id="{70F94CF4-DC5B-F746-A6B2-66C89B28EAF6}" type="datetimeFigureOut">
               <a:rPr lang="en-US" smtClean="0"/>
-              <a:t>5/26/24</a:t>
+              <a:t>4/12/25</a:t>
             </a:fld>
             <a:endParaRPr lang="en-US"/>
           </a:p>
@@ -2350,7 +2792,7 @@
           <a:p>
             <a:fld id="{70F94CF4-DC5B-F746-A6B2-66C89B28EAF6}" type="datetimeFigureOut">
               <a:rPr lang="en-US" smtClean="0"/>
-              <a:t>5/26/24</a:t>
+              <a:t>4/12/25</a:t>
             </a:fld>
             <a:endParaRPr lang="en-US"/>
           </a:p>
@@ -2563,7 +3005,7 @@
           <a:p>
             <a:fld id="{70F94CF4-DC5B-F746-A6B2-66C89B28EAF6}" type="datetimeFigureOut">
               <a:rPr lang="en-US" smtClean="0"/>
-              <a:t>5/26/24</a:t>
+              <a:t>4/12/25</a:t>
             </a:fld>
             <a:endParaRPr lang="en-US"/>
           </a:p>
@@ -4221,6 +4663,952 @@
 </p:sld>
 </file>
 
+<file path=ppt/slides/slide2.xml><?xml version="1.0" encoding="utf-8"?>
+<p:sld xmlns:a="http://schemas.openxmlformats.org/drawingml/2006/main" xmlns:r="http://schemas.openxmlformats.org/officeDocument/2006/relationships" xmlns:p="http://schemas.openxmlformats.org/presentationml/2006/main">
+  <p:cSld>
+    <p:spTree>
+      <p:nvGrpSpPr>
+        <p:cNvPr id="1" name=""/>
+        <p:cNvGrpSpPr/>
+        <p:nvPr/>
+      </p:nvGrpSpPr>
+      <p:grpSpPr>
+        <a:xfrm>
+          <a:off x="0" y="0"/>
+          <a:ext cx="0" cy="0"/>
+          <a:chOff x="0" y="0"/>
+          <a:chExt cx="0" cy="0"/>
+        </a:xfrm>
+      </p:grpSpPr>
+      <p:pic>
+        <p:nvPicPr>
+          <p:cNvPr id="42" name="Graphic 41">
+            <a:extLst>
+              <a:ext uri="{FF2B5EF4-FFF2-40B4-BE49-F238E27FC236}">
+                <a16:creationId xmlns:a16="http://schemas.microsoft.com/office/drawing/2014/main" id="{ECC9686B-0E0C-74E5-DEB2-8788370BB639}"/>
+              </a:ext>
+            </a:extLst>
+          </p:cNvPr>
+          <p:cNvPicPr>
+            <a:picLocks noChangeAspect="1"/>
+          </p:cNvPicPr>
+          <p:nvPr/>
+        </p:nvPicPr>
+        <p:blipFill>
+          <a:blip r:embed="rId3">
+            <a:extLst>
+              <a:ext uri="{96DAC541-7B7A-43D3-8B79-37D633B846F1}">
+                <asvg:svgBlip xmlns:asvg="http://schemas.microsoft.com/office/drawing/2016/SVG/main" r:embed="rId4"/>
+              </a:ext>
+            </a:extLst>
+          </a:blip>
+          <a:stretch>
+            <a:fillRect/>
+          </a:stretch>
+        </p:blipFill>
+        <p:spPr>
+          <a:xfrm>
+            <a:off x="-2181498" y="-525876"/>
+            <a:ext cx="15022287" cy="7551024"/>
+          </a:xfrm>
+          <a:prstGeom prst="rect">
+            <a:avLst/>
+          </a:prstGeom>
+        </p:spPr>
+      </p:pic>
+      <p:pic>
+        <p:nvPicPr>
+          <p:cNvPr id="8" name="Graphic 7">
+            <a:extLst>
+              <a:ext uri="{FF2B5EF4-FFF2-40B4-BE49-F238E27FC236}">
+                <a16:creationId xmlns:a16="http://schemas.microsoft.com/office/drawing/2014/main" id="{7499DC27-58A1-3AA6-C731-72F1F5846AAC}"/>
+              </a:ext>
+            </a:extLst>
+          </p:cNvPr>
+          <p:cNvPicPr>
+            <a:picLocks noChangeAspect="1"/>
+          </p:cNvPicPr>
+          <p:nvPr/>
+        </p:nvPicPr>
+        <p:blipFill>
+          <a:blip r:embed="rId5">
+            <a:extLst>
+              <a:ext uri="{96DAC541-7B7A-43D3-8B79-37D633B846F1}">
+                <asvg:svgBlip xmlns:asvg="http://schemas.microsoft.com/office/drawing/2016/SVG/main" r:embed="rId6"/>
+              </a:ext>
+            </a:extLst>
+          </a:blip>
+          <a:stretch>
+            <a:fillRect/>
+          </a:stretch>
+        </p:blipFill>
+        <p:spPr>
+          <a:xfrm>
+            <a:off x="2463102" y="-386668"/>
+            <a:ext cx="4217793" cy="4217793"/>
+          </a:xfrm>
+          <a:prstGeom prst="rect">
+            <a:avLst/>
+          </a:prstGeom>
+        </p:spPr>
+      </p:pic>
+      <p:sp>
+        <p:nvSpPr>
+          <p:cNvPr id="15" name="Rectangle 14">
+            <a:extLst>
+              <a:ext uri="{FF2B5EF4-FFF2-40B4-BE49-F238E27FC236}">
+                <a16:creationId xmlns:a16="http://schemas.microsoft.com/office/drawing/2014/main" id="{0F15BA50-2FB7-4454-D608-009487EDF79F}"/>
+              </a:ext>
+            </a:extLst>
+          </p:cNvPr>
+          <p:cNvSpPr/>
+          <p:nvPr/>
+        </p:nvSpPr>
+        <p:spPr>
+          <a:xfrm>
+            <a:off x="422025" y="3148525"/>
+            <a:ext cx="8299939" cy="3123032"/>
+          </a:xfrm>
+          <a:prstGeom prst="rect">
+            <a:avLst/>
+          </a:prstGeom>
+          <a:solidFill>
+            <a:schemeClr val="bg1">
+              <a:lumMod val="85000"/>
+            </a:schemeClr>
+          </a:solidFill>
+          <a:ln>
+            <a:noFill/>
+          </a:ln>
+        </p:spPr>
+        <p:style>
+          <a:lnRef idx="2">
+            <a:schemeClr val="accent1">
+              <a:shade val="15000"/>
+            </a:schemeClr>
+          </a:lnRef>
+          <a:fillRef idx="1">
+            <a:schemeClr val="accent1"/>
+          </a:fillRef>
+          <a:effectRef idx="0">
+            <a:schemeClr val="accent1"/>
+          </a:effectRef>
+          <a:fontRef idx="minor">
+            <a:schemeClr val="lt1"/>
+          </a:fontRef>
+        </p:style>
+        <p:txBody>
+          <a:bodyPr rtlCol="0" anchor="ctr"/>
+          <a:lstStyle/>
+          <a:p>
+            <a:pPr algn="ctr"/>
+            <a:endParaRPr lang="en-US"/>
+          </a:p>
+        </p:txBody>
+      </p:sp>
+      <p:sp>
+        <p:nvSpPr>
+          <p:cNvPr id="9" name="Rectangle 8">
+            <a:extLst>
+              <a:ext uri="{FF2B5EF4-FFF2-40B4-BE49-F238E27FC236}">
+                <a16:creationId xmlns:a16="http://schemas.microsoft.com/office/drawing/2014/main" id="{3A549709-ADE0-B33E-8035-3EA1B2CD6CAE}"/>
+              </a:ext>
+            </a:extLst>
+          </p:cNvPr>
+          <p:cNvSpPr/>
+          <p:nvPr/>
+        </p:nvSpPr>
+        <p:spPr>
+          <a:xfrm>
+            <a:off x="800093" y="3249636"/>
+            <a:ext cx="2268417" cy="449662"/>
+          </a:xfrm>
+          <a:prstGeom prst="rect">
+            <a:avLst/>
+          </a:prstGeom>
+          <a:solidFill>
+            <a:schemeClr val="bg2">
+              <a:lumMod val="50000"/>
+            </a:schemeClr>
+          </a:solidFill>
+          <a:ln>
+            <a:noFill/>
+          </a:ln>
+        </p:spPr>
+        <p:style>
+          <a:lnRef idx="2">
+            <a:schemeClr val="accent1">
+              <a:shade val="15000"/>
+            </a:schemeClr>
+          </a:lnRef>
+          <a:fillRef idx="1">
+            <a:schemeClr val="accent1"/>
+          </a:fillRef>
+          <a:effectRef idx="0">
+            <a:schemeClr val="accent1"/>
+          </a:effectRef>
+          <a:fontRef idx="minor">
+            <a:schemeClr val="lt1"/>
+          </a:fontRef>
+        </p:style>
+        <p:txBody>
+          <a:bodyPr rtlCol="0" anchor="ctr"/>
+          <a:lstStyle/>
+          <a:p>
+            <a:pPr algn="ctr"/>
+            <a:r>
+              <a:rPr lang="en-US" dirty="0">
+                <a:latin typeface="Helvetica" pitchFamily="2" charset="0"/>
+              </a:rPr>
+              <a:t>Motor Intention</a:t>
+            </a:r>
+          </a:p>
+        </p:txBody>
+      </p:sp>
+      <p:sp>
+        <p:nvSpPr>
+          <p:cNvPr id="10" name="Rectangle 9">
+            <a:extLst>
+              <a:ext uri="{FF2B5EF4-FFF2-40B4-BE49-F238E27FC236}">
+                <a16:creationId xmlns:a16="http://schemas.microsoft.com/office/drawing/2014/main" id="{72DBC378-26EB-099D-BB7A-0AD57F1AFBFC}"/>
+              </a:ext>
+            </a:extLst>
+          </p:cNvPr>
+          <p:cNvSpPr/>
+          <p:nvPr/>
+        </p:nvSpPr>
+        <p:spPr>
+          <a:xfrm>
+            <a:off x="3437789" y="3249636"/>
+            <a:ext cx="2268417" cy="449662"/>
+          </a:xfrm>
+          <a:prstGeom prst="rect">
+            <a:avLst/>
+          </a:prstGeom>
+          <a:solidFill>
+            <a:schemeClr val="bg2">
+              <a:lumMod val="50000"/>
+            </a:schemeClr>
+          </a:solidFill>
+          <a:ln>
+            <a:noFill/>
+          </a:ln>
+        </p:spPr>
+        <p:style>
+          <a:lnRef idx="2">
+            <a:schemeClr val="accent1">
+              <a:shade val="15000"/>
+            </a:schemeClr>
+          </a:lnRef>
+          <a:fillRef idx="1">
+            <a:schemeClr val="accent1"/>
+          </a:fillRef>
+          <a:effectRef idx="0">
+            <a:schemeClr val="accent1"/>
+          </a:effectRef>
+          <a:fontRef idx="minor">
+            <a:schemeClr val="lt1"/>
+          </a:fontRef>
+        </p:style>
+        <p:txBody>
+          <a:bodyPr rtlCol="0" anchor="ctr"/>
+          <a:lstStyle/>
+          <a:p>
+            <a:pPr algn="ctr"/>
+            <a:r>
+              <a:rPr lang="en-US" dirty="0">
+                <a:latin typeface="Helvetica" pitchFamily="2" charset="0"/>
+              </a:rPr>
+              <a:t>Motor Planning</a:t>
+            </a:r>
+          </a:p>
+        </p:txBody>
+      </p:sp>
+      <p:sp>
+        <p:nvSpPr>
+          <p:cNvPr id="11" name="Rectangle 10">
+            <a:extLst>
+              <a:ext uri="{FF2B5EF4-FFF2-40B4-BE49-F238E27FC236}">
+                <a16:creationId xmlns:a16="http://schemas.microsoft.com/office/drawing/2014/main" id="{BC102AD8-A5F4-22EE-647D-6BBF5440C3BB}"/>
+              </a:ext>
+            </a:extLst>
+          </p:cNvPr>
+          <p:cNvSpPr/>
+          <p:nvPr/>
+        </p:nvSpPr>
+        <p:spPr>
+          <a:xfrm>
+            <a:off x="6075485" y="3249636"/>
+            <a:ext cx="2268417" cy="449662"/>
+          </a:xfrm>
+          <a:prstGeom prst="rect">
+            <a:avLst/>
+          </a:prstGeom>
+          <a:solidFill>
+            <a:schemeClr val="bg2">
+              <a:lumMod val="50000"/>
+            </a:schemeClr>
+          </a:solidFill>
+          <a:ln>
+            <a:noFill/>
+          </a:ln>
+        </p:spPr>
+        <p:style>
+          <a:lnRef idx="2">
+            <a:schemeClr val="accent1">
+              <a:shade val="15000"/>
+            </a:schemeClr>
+          </a:lnRef>
+          <a:fillRef idx="1">
+            <a:schemeClr val="accent1"/>
+          </a:fillRef>
+          <a:effectRef idx="0">
+            <a:schemeClr val="accent1"/>
+          </a:effectRef>
+          <a:fontRef idx="minor">
+            <a:schemeClr val="lt1"/>
+          </a:fontRef>
+        </p:style>
+        <p:txBody>
+          <a:bodyPr rtlCol="0" anchor="ctr"/>
+          <a:lstStyle/>
+          <a:p>
+            <a:pPr algn="ctr"/>
+            <a:r>
+              <a:rPr lang="en-US" dirty="0">
+                <a:latin typeface="Helvetica" pitchFamily="2" charset="0"/>
+              </a:rPr>
+              <a:t>Action Execution</a:t>
+            </a:r>
+          </a:p>
+        </p:txBody>
+      </p:sp>
+      <p:sp>
+        <p:nvSpPr>
+          <p:cNvPr id="12" name="Rectangle 11">
+            <a:extLst>
+              <a:ext uri="{FF2B5EF4-FFF2-40B4-BE49-F238E27FC236}">
+                <a16:creationId xmlns:a16="http://schemas.microsoft.com/office/drawing/2014/main" id="{805AFE66-5A3D-5BD7-5E40-BF1F094EACC3}"/>
+              </a:ext>
+            </a:extLst>
+          </p:cNvPr>
+          <p:cNvSpPr/>
+          <p:nvPr/>
+        </p:nvSpPr>
+        <p:spPr>
+          <a:xfrm>
+            <a:off x="800093" y="4204230"/>
+            <a:ext cx="2268417" cy="449662"/>
+          </a:xfrm>
+          <a:prstGeom prst="rect">
+            <a:avLst/>
+          </a:prstGeom>
+          <a:noFill/>
+          <a:ln>
+            <a:solidFill>
+              <a:schemeClr val="bg2">
+                <a:lumMod val="50000"/>
+              </a:schemeClr>
+            </a:solidFill>
+          </a:ln>
+        </p:spPr>
+        <p:style>
+          <a:lnRef idx="2">
+            <a:schemeClr val="accent1">
+              <a:shade val="15000"/>
+            </a:schemeClr>
+          </a:lnRef>
+          <a:fillRef idx="1">
+            <a:schemeClr val="accent1"/>
+          </a:fillRef>
+          <a:effectRef idx="0">
+            <a:schemeClr val="accent1"/>
+          </a:effectRef>
+          <a:fontRef idx="minor">
+            <a:schemeClr val="lt1"/>
+          </a:fontRef>
+        </p:style>
+        <p:txBody>
+          <a:bodyPr rtlCol="0" anchor="ctr"/>
+          <a:lstStyle/>
+          <a:p>
+            <a:pPr algn="ctr"/>
+            <a:r>
+              <a:rPr lang="en-US" dirty="0">
+                <a:solidFill>
+                  <a:schemeClr val="bg2">
+                    <a:lumMod val="50000"/>
+                  </a:schemeClr>
+                </a:solidFill>
+                <a:latin typeface="Helvetica" pitchFamily="2" charset="0"/>
+              </a:rPr>
+              <a:t>Predicted Outcome</a:t>
+            </a:r>
+          </a:p>
+        </p:txBody>
+      </p:sp>
+      <p:sp>
+        <p:nvSpPr>
+          <p:cNvPr id="13" name="Rectangle 12">
+            <a:extLst>
+              <a:ext uri="{FF2B5EF4-FFF2-40B4-BE49-F238E27FC236}">
+                <a16:creationId xmlns:a16="http://schemas.microsoft.com/office/drawing/2014/main" id="{26F42063-CE28-3E72-341B-4657D98C0261}"/>
+              </a:ext>
+            </a:extLst>
+          </p:cNvPr>
+          <p:cNvSpPr/>
+          <p:nvPr/>
+        </p:nvSpPr>
+        <p:spPr>
+          <a:xfrm>
+            <a:off x="6075485" y="4204230"/>
+            <a:ext cx="2268417" cy="449662"/>
+          </a:xfrm>
+          <a:prstGeom prst="rect">
+            <a:avLst/>
+          </a:prstGeom>
+          <a:noFill/>
+          <a:ln>
+            <a:solidFill>
+              <a:schemeClr val="bg2">
+                <a:lumMod val="50000"/>
+              </a:schemeClr>
+            </a:solidFill>
+          </a:ln>
+        </p:spPr>
+        <p:style>
+          <a:lnRef idx="2">
+            <a:schemeClr val="accent1">
+              <a:shade val="15000"/>
+            </a:schemeClr>
+          </a:lnRef>
+          <a:fillRef idx="1">
+            <a:schemeClr val="accent1"/>
+          </a:fillRef>
+          <a:effectRef idx="0">
+            <a:schemeClr val="accent1"/>
+          </a:effectRef>
+          <a:fontRef idx="minor">
+            <a:schemeClr val="lt1"/>
+          </a:fontRef>
+        </p:style>
+        <p:txBody>
+          <a:bodyPr rtlCol="0" anchor="ctr"/>
+          <a:lstStyle/>
+          <a:p>
+            <a:pPr algn="ctr"/>
+            <a:r>
+              <a:rPr lang="en-US" dirty="0">
+                <a:solidFill>
+                  <a:schemeClr val="bg2">
+                    <a:lumMod val="50000"/>
+                  </a:schemeClr>
+                </a:solidFill>
+                <a:latin typeface="Helvetica" pitchFamily="2" charset="0"/>
+              </a:rPr>
+              <a:t>Actual Outcome</a:t>
+            </a:r>
+          </a:p>
+        </p:txBody>
+      </p:sp>
+      <p:sp>
+        <p:nvSpPr>
+          <p:cNvPr id="14" name="Rectangle 13">
+            <a:extLst>
+              <a:ext uri="{FF2B5EF4-FFF2-40B4-BE49-F238E27FC236}">
+                <a16:creationId xmlns:a16="http://schemas.microsoft.com/office/drawing/2014/main" id="{E345DA73-1FDF-34F8-D123-C8878979B524}"/>
+              </a:ext>
+            </a:extLst>
+          </p:cNvPr>
+          <p:cNvSpPr/>
+          <p:nvPr/>
+        </p:nvSpPr>
+        <p:spPr>
+          <a:xfrm>
+            <a:off x="2918035" y="5158824"/>
+            <a:ext cx="3307924" cy="449662"/>
+          </a:xfrm>
+          <a:prstGeom prst="rect">
+            <a:avLst/>
+          </a:prstGeom>
+          <a:solidFill>
+            <a:schemeClr val="accent6">
+              <a:lumMod val="20000"/>
+              <a:lumOff val="80000"/>
+            </a:schemeClr>
+          </a:solidFill>
+          <a:ln>
+            <a:solidFill>
+              <a:schemeClr val="accent6">
+                <a:lumMod val="75000"/>
+              </a:schemeClr>
+            </a:solidFill>
+          </a:ln>
+        </p:spPr>
+        <p:style>
+          <a:lnRef idx="2">
+            <a:schemeClr val="accent1">
+              <a:shade val="15000"/>
+            </a:schemeClr>
+          </a:lnRef>
+          <a:fillRef idx="1">
+            <a:schemeClr val="accent1"/>
+          </a:fillRef>
+          <a:effectRef idx="0">
+            <a:schemeClr val="accent1"/>
+          </a:effectRef>
+          <a:fontRef idx="minor">
+            <a:schemeClr val="lt1"/>
+          </a:fontRef>
+        </p:style>
+        <p:txBody>
+          <a:bodyPr rtlCol="0" anchor="ctr"/>
+          <a:lstStyle/>
+          <a:p>
+            <a:pPr algn="ctr"/>
+            <a:r>
+              <a:rPr lang="en-US" dirty="0">
+                <a:solidFill>
+                  <a:schemeClr val="accent6">
+                    <a:lumMod val="75000"/>
+                  </a:schemeClr>
+                </a:solidFill>
+                <a:latin typeface="Helvetica" pitchFamily="2" charset="0"/>
+              </a:rPr>
+              <a:t>Match ➔ Sense of Agency?</a:t>
+            </a:r>
+          </a:p>
+        </p:txBody>
+      </p:sp>
+      <p:sp>
+        <p:nvSpPr>
+          <p:cNvPr id="16" name="Trapezoid 15">
+            <a:extLst>
+              <a:ext uri="{FF2B5EF4-FFF2-40B4-BE49-F238E27FC236}">
+                <a16:creationId xmlns:a16="http://schemas.microsoft.com/office/drawing/2014/main" id="{7D9ECC40-134C-B73C-80A4-5F0862875CCA}"/>
+              </a:ext>
+            </a:extLst>
+          </p:cNvPr>
+          <p:cNvSpPr/>
+          <p:nvPr/>
+        </p:nvSpPr>
+        <p:spPr>
+          <a:xfrm>
+            <a:off x="422026" y="2277332"/>
+            <a:ext cx="8299939" cy="871193"/>
+          </a:xfrm>
+          <a:prstGeom prst="trapezoid">
+            <a:avLst>
+              <a:gd name="adj" fmla="val 217528"/>
+            </a:avLst>
+          </a:prstGeom>
+          <a:gradFill>
+            <a:gsLst>
+              <a:gs pos="0">
+                <a:schemeClr val="bg1">
+                  <a:lumMod val="85000"/>
+                  <a:alpha val="0"/>
+                </a:schemeClr>
+              </a:gs>
+              <a:gs pos="100000">
+                <a:schemeClr val="bg1">
+                  <a:lumMod val="85000"/>
+                </a:schemeClr>
+              </a:gs>
+            </a:gsLst>
+            <a:lin ang="5400000" scaled="1"/>
+          </a:gradFill>
+          <a:ln>
+            <a:noFill/>
+          </a:ln>
+        </p:spPr>
+        <p:style>
+          <a:lnRef idx="2">
+            <a:schemeClr val="accent1">
+              <a:shade val="15000"/>
+            </a:schemeClr>
+          </a:lnRef>
+          <a:fillRef idx="1">
+            <a:schemeClr val="accent1"/>
+          </a:fillRef>
+          <a:effectRef idx="0">
+            <a:schemeClr val="accent1"/>
+          </a:effectRef>
+          <a:fontRef idx="minor">
+            <a:schemeClr val="lt1"/>
+          </a:fontRef>
+        </p:style>
+        <p:txBody>
+          <a:bodyPr rtlCol="0" anchor="ctr"/>
+          <a:lstStyle/>
+          <a:p>
+            <a:pPr algn="ctr"/>
+            <a:endParaRPr lang="en-US"/>
+          </a:p>
+        </p:txBody>
+      </p:sp>
+      <p:cxnSp>
+        <p:nvCxnSpPr>
+          <p:cNvPr id="20" name="Straight Arrow Connector 19">
+            <a:extLst>
+              <a:ext uri="{FF2B5EF4-FFF2-40B4-BE49-F238E27FC236}">
+                <a16:creationId xmlns:a16="http://schemas.microsoft.com/office/drawing/2014/main" id="{AC5792CC-536B-980D-142B-F6217A820D1F}"/>
+              </a:ext>
+            </a:extLst>
+          </p:cNvPr>
+          <p:cNvCxnSpPr>
+            <a:cxnSpLocks/>
+          </p:cNvCxnSpPr>
+          <p:nvPr/>
+        </p:nvCxnSpPr>
+        <p:spPr>
+          <a:xfrm>
+            <a:off x="5746858" y="3474467"/>
+            <a:ext cx="287975" cy="0"/>
+          </a:xfrm>
+          <a:prstGeom prst="straightConnector1">
+            <a:avLst/>
+          </a:prstGeom>
+          <a:ln w="57150">
+            <a:solidFill>
+              <a:schemeClr val="tx1">
+                <a:lumMod val="75000"/>
+                <a:lumOff val="25000"/>
+              </a:schemeClr>
+            </a:solidFill>
+            <a:tailEnd type="triangle"/>
+          </a:ln>
+        </p:spPr>
+        <p:style>
+          <a:lnRef idx="2">
+            <a:schemeClr val="accent1"/>
+          </a:lnRef>
+          <a:fillRef idx="0">
+            <a:schemeClr val="accent1"/>
+          </a:fillRef>
+          <a:effectRef idx="1">
+            <a:schemeClr val="accent1"/>
+          </a:effectRef>
+          <a:fontRef idx="minor">
+            <a:schemeClr val="tx1"/>
+          </a:fontRef>
+        </p:style>
+      </p:cxnSp>
+      <p:cxnSp>
+        <p:nvCxnSpPr>
+          <p:cNvPr id="22" name="Straight Arrow Connector 21">
+            <a:extLst>
+              <a:ext uri="{FF2B5EF4-FFF2-40B4-BE49-F238E27FC236}">
+                <a16:creationId xmlns:a16="http://schemas.microsoft.com/office/drawing/2014/main" id="{FD1ACB1C-1D31-FD14-B8CF-C84A3C261FDF}"/>
+              </a:ext>
+            </a:extLst>
+          </p:cNvPr>
+          <p:cNvCxnSpPr>
+            <a:cxnSpLocks/>
+          </p:cNvCxnSpPr>
+          <p:nvPr/>
+        </p:nvCxnSpPr>
+        <p:spPr>
+          <a:xfrm>
+            <a:off x="3109162" y="3474467"/>
+            <a:ext cx="287975" cy="0"/>
+          </a:xfrm>
+          <a:prstGeom prst="straightConnector1">
+            <a:avLst/>
+          </a:prstGeom>
+          <a:ln w="57150">
+            <a:solidFill>
+              <a:schemeClr val="tx1">
+                <a:lumMod val="75000"/>
+                <a:lumOff val="25000"/>
+              </a:schemeClr>
+            </a:solidFill>
+            <a:tailEnd type="triangle"/>
+          </a:ln>
+        </p:spPr>
+        <p:style>
+          <a:lnRef idx="2">
+            <a:schemeClr val="accent1"/>
+          </a:lnRef>
+          <a:fillRef idx="0">
+            <a:schemeClr val="accent1"/>
+          </a:fillRef>
+          <a:effectRef idx="1">
+            <a:schemeClr val="accent1"/>
+          </a:effectRef>
+          <a:fontRef idx="minor">
+            <a:schemeClr val="tx1"/>
+          </a:fontRef>
+        </p:style>
+      </p:cxnSp>
+      <p:cxnSp>
+        <p:nvCxnSpPr>
+          <p:cNvPr id="24" name="Straight Connector 23">
+            <a:extLst>
+              <a:ext uri="{FF2B5EF4-FFF2-40B4-BE49-F238E27FC236}">
+                <a16:creationId xmlns:a16="http://schemas.microsoft.com/office/drawing/2014/main" id="{3B8AB07F-BC8A-0394-06AB-021ADCF098C0}"/>
+              </a:ext>
+            </a:extLst>
+          </p:cNvPr>
+          <p:cNvCxnSpPr>
+            <a:cxnSpLocks/>
+            <a:stCxn id="9" idx="2"/>
+            <a:endCxn id="12" idx="0"/>
+          </p:cNvCxnSpPr>
+          <p:nvPr/>
+        </p:nvCxnSpPr>
+        <p:spPr>
+          <a:xfrm>
+            <a:off x="1934302" y="3699298"/>
+            <a:ext cx="0" cy="504932"/>
+          </a:xfrm>
+          <a:prstGeom prst="line">
+            <a:avLst/>
+          </a:prstGeom>
+          <a:ln w="25400">
+            <a:solidFill>
+              <a:schemeClr val="tx1">
+                <a:lumMod val="50000"/>
+                <a:lumOff val="50000"/>
+              </a:schemeClr>
+            </a:solidFill>
+            <a:prstDash val="sysDash"/>
+          </a:ln>
+        </p:spPr>
+        <p:style>
+          <a:lnRef idx="2">
+            <a:schemeClr val="accent1"/>
+          </a:lnRef>
+          <a:fillRef idx="0">
+            <a:schemeClr val="accent1"/>
+          </a:fillRef>
+          <a:effectRef idx="1">
+            <a:schemeClr val="accent1"/>
+          </a:effectRef>
+          <a:fontRef idx="minor">
+            <a:schemeClr val="tx1"/>
+          </a:fontRef>
+        </p:style>
+      </p:cxnSp>
+      <p:cxnSp>
+        <p:nvCxnSpPr>
+          <p:cNvPr id="28" name="Straight Connector 27">
+            <a:extLst>
+              <a:ext uri="{FF2B5EF4-FFF2-40B4-BE49-F238E27FC236}">
+                <a16:creationId xmlns:a16="http://schemas.microsoft.com/office/drawing/2014/main" id="{5BF496F8-4525-A307-4B8E-552B60F57890}"/>
+              </a:ext>
+            </a:extLst>
+          </p:cNvPr>
+          <p:cNvCxnSpPr>
+            <a:cxnSpLocks/>
+            <a:stCxn id="11" idx="2"/>
+            <a:endCxn id="13" idx="0"/>
+          </p:cNvCxnSpPr>
+          <p:nvPr/>
+        </p:nvCxnSpPr>
+        <p:spPr>
+          <a:xfrm>
+            <a:off x="7209694" y="3699298"/>
+            <a:ext cx="0" cy="504932"/>
+          </a:xfrm>
+          <a:prstGeom prst="line">
+            <a:avLst/>
+          </a:prstGeom>
+          <a:ln w="25400">
+            <a:solidFill>
+              <a:schemeClr val="tx1">
+                <a:lumMod val="50000"/>
+                <a:lumOff val="50000"/>
+              </a:schemeClr>
+            </a:solidFill>
+            <a:prstDash val="sysDash"/>
+          </a:ln>
+        </p:spPr>
+        <p:style>
+          <a:lnRef idx="2">
+            <a:schemeClr val="accent1"/>
+          </a:lnRef>
+          <a:fillRef idx="0">
+            <a:schemeClr val="accent1"/>
+          </a:fillRef>
+          <a:effectRef idx="1">
+            <a:schemeClr val="accent1"/>
+          </a:effectRef>
+          <a:fontRef idx="minor">
+            <a:schemeClr val="tx1"/>
+          </a:fontRef>
+        </p:style>
+      </p:cxnSp>
+      <p:cxnSp>
+        <p:nvCxnSpPr>
+          <p:cNvPr id="32" name="Straight Connector 31">
+            <a:extLst>
+              <a:ext uri="{FF2B5EF4-FFF2-40B4-BE49-F238E27FC236}">
+                <a16:creationId xmlns:a16="http://schemas.microsoft.com/office/drawing/2014/main" id="{4EAA57E5-54CB-8F6C-B311-4A83A4C38AD0}"/>
+              </a:ext>
+            </a:extLst>
+          </p:cNvPr>
+          <p:cNvCxnSpPr>
+            <a:cxnSpLocks/>
+          </p:cNvCxnSpPr>
+          <p:nvPr/>
+        </p:nvCxnSpPr>
+        <p:spPr>
+          <a:xfrm>
+            <a:off x="3158476" y="4525038"/>
+            <a:ext cx="436371" cy="565961"/>
+          </a:xfrm>
+          <a:prstGeom prst="line">
+            <a:avLst/>
+          </a:prstGeom>
+          <a:ln w="38100">
+            <a:solidFill>
+              <a:schemeClr val="tx1">
+                <a:lumMod val="50000"/>
+                <a:lumOff val="50000"/>
+              </a:schemeClr>
+            </a:solidFill>
+            <a:prstDash val="solid"/>
+            <a:tailEnd type="triangle"/>
+          </a:ln>
+        </p:spPr>
+        <p:style>
+          <a:lnRef idx="2">
+            <a:schemeClr val="accent1"/>
+          </a:lnRef>
+          <a:fillRef idx="0">
+            <a:schemeClr val="accent1"/>
+          </a:fillRef>
+          <a:effectRef idx="1">
+            <a:schemeClr val="accent1"/>
+          </a:effectRef>
+          <a:fontRef idx="minor">
+            <a:schemeClr val="tx1"/>
+          </a:fontRef>
+        </p:style>
+      </p:cxnSp>
+      <p:cxnSp>
+        <p:nvCxnSpPr>
+          <p:cNvPr id="37" name="Straight Connector 36">
+            <a:extLst>
+              <a:ext uri="{FF2B5EF4-FFF2-40B4-BE49-F238E27FC236}">
+                <a16:creationId xmlns:a16="http://schemas.microsoft.com/office/drawing/2014/main" id="{F3E8DDFD-D10A-01B1-577A-F643F9C300C9}"/>
+              </a:ext>
+            </a:extLst>
+          </p:cNvPr>
+          <p:cNvCxnSpPr>
+            <a:cxnSpLocks/>
+          </p:cNvCxnSpPr>
+          <p:nvPr/>
+        </p:nvCxnSpPr>
+        <p:spPr>
+          <a:xfrm flipH="1">
+            <a:off x="5549148" y="4525037"/>
+            <a:ext cx="436371" cy="565961"/>
+          </a:xfrm>
+          <a:prstGeom prst="line">
+            <a:avLst/>
+          </a:prstGeom>
+          <a:ln w="38100">
+            <a:solidFill>
+              <a:schemeClr val="tx1">
+                <a:lumMod val="50000"/>
+                <a:lumOff val="50000"/>
+              </a:schemeClr>
+            </a:solidFill>
+            <a:prstDash val="solid"/>
+            <a:headEnd w="lg" len="lg"/>
+            <a:tailEnd type="triangle"/>
+          </a:ln>
+        </p:spPr>
+        <p:style>
+          <a:lnRef idx="2">
+            <a:schemeClr val="accent1"/>
+          </a:lnRef>
+          <a:fillRef idx="0">
+            <a:schemeClr val="accent1"/>
+          </a:fillRef>
+          <a:effectRef idx="1">
+            <a:schemeClr val="accent1"/>
+          </a:effectRef>
+          <a:fontRef idx="minor">
+            <a:schemeClr val="tx1"/>
+          </a:fontRef>
+        </p:style>
+      </p:cxnSp>
+      <p:sp>
+        <p:nvSpPr>
+          <p:cNvPr id="38" name="Rectangle 37">
+            <a:extLst>
+              <a:ext uri="{FF2B5EF4-FFF2-40B4-BE49-F238E27FC236}">
+                <a16:creationId xmlns:a16="http://schemas.microsoft.com/office/drawing/2014/main" id="{1A4F08AC-FF6A-147A-EF41-7BD4DC373AA2}"/>
+              </a:ext>
+            </a:extLst>
+          </p:cNvPr>
+          <p:cNvSpPr/>
+          <p:nvPr/>
+        </p:nvSpPr>
+        <p:spPr>
+          <a:xfrm>
+            <a:off x="2950442" y="5696095"/>
+            <a:ext cx="3243103" cy="449662"/>
+          </a:xfrm>
+          <a:prstGeom prst="rect">
+            <a:avLst/>
+          </a:prstGeom>
+          <a:noFill/>
+          <a:ln>
+            <a:noFill/>
+          </a:ln>
+        </p:spPr>
+        <p:style>
+          <a:lnRef idx="2">
+            <a:schemeClr val="accent1">
+              <a:shade val="15000"/>
+            </a:schemeClr>
+          </a:lnRef>
+          <a:fillRef idx="1">
+            <a:schemeClr val="accent1"/>
+          </a:fillRef>
+          <a:effectRef idx="0">
+            <a:schemeClr val="accent1"/>
+          </a:effectRef>
+          <a:fontRef idx="minor">
+            <a:schemeClr val="lt1"/>
+          </a:fontRef>
+        </p:style>
+        <p:txBody>
+          <a:bodyPr rtlCol="0" anchor="ctr"/>
+          <a:lstStyle/>
+          <a:p>
+            <a:pPr algn="ctr"/>
+            <a:r>
+              <a:rPr lang="en-US" sz="1600" dirty="0">
+                <a:solidFill>
+                  <a:schemeClr val="bg2">
+                    <a:lumMod val="50000"/>
+                  </a:schemeClr>
+                </a:solidFill>
+                <a:latin typeface="Helvetica" pitchFamily="2" charset="0"/>
+              </a:rPr>
+              <a:t>Machine Learning with EEG</a:t>
+            </a:r>
+          </a:p>
+        </p:txBody>
+      </p:sp>
+    </p:spTree>
+    <p:extLst>
+      <p:ext uri="{BB962C8B-B14F-4D97-AF65-F5344CB8AC3E}">
+        <p14:creationId xmlns:p14="http://schemas.microsoft.com/office/powerpoint/2010/main" val="3187905037"/>
+      </p:ext>
+    </p:extLst>
+  </p:cSld>
+  <p:clrMapOvr>
+    <a:masterClrMapping/>
+  </p:clrMapOvr>
+</p:sld>
+</file>
+
 <file path=ppt/theme/theme1.xml><?xml version="1.0" encoding="utf-8"?>
 <a:theme xmlns:a="http://schemas.openxmlformats.org/drawingml/2006/main" name="Office Theme">
   <a:themeElements>
@@ -4534,4 +5922,319 @@
     </a:ext>
   </a:extLst>
 </a:theme>
+</file>
+
+<file path=ppt/theme/theme2.xml><?xml version="1.0" encoding="utf-8"?>
+<a:theme xmlns:a="http://schemas.openxmlformats.org/drawingml/2006/main" name="Office Theme">
+  <a:themeElements>
+    <a:clrScheme name="Office">
+      <a:dk1>
+        <a:sysClr val="windowText" lastClr="000000"/>
+      </a:dk1>
+      <a:lt1>
+        <a:sysClr val="window" lastClr="FFFFFF"/>
+      </a:lt1>
+      <a:dk2>
+        <a:srgbClr val="0E2841"/>
+      </a:dk2>
+      <a:lt2>
+        <a:srgbClr val="E8E8E8"/>
+      </a:lt2>
+      <a:accent1>
+        <a:srgbClr val="156082"/>
+      </a:accent1>
+      <a:accent2>
+        <a:srgbClr val="E97132"/>
+      </a:accent2>
+      <a:accent3>
+        <a:srgbClr val="196B24"/>
+      </a:accent3>
+      <a:accent4>
+        <a:srgbClr val="0F9ED5"/>
+      </a:accent4>
+      <a:accent5>
+        <a:srgbClr val="A02B93"/>
+      </a:accent5>
+      <a:accent6>
+        <a:srgbClr val="4EA72E"/>
+      </a:accent6>
+      <a:hlink>
+        <a:srgbClr val="467886"/>
+      </a:hlink>
+      <a:folHlink>
+        <a:srgbClr val="96607D"/>
+      </a:folHlink>
+    </a:clrScheme>
+    <a:fontScheme name="Office">
+      <a:majorFont>
+        <a:latin typeface="Aptos Display" panose="02110004020202020204"/>
+        <a:ea typeface=""/>
+        <a:cs typeface=""/>
+        <a:font script="Jpan" typeface="游ゴシック Light"/>
+        <a:font script="Hang" typeface="맑은 고딕"/>
+        <a:font script="Hans" typeface="等线 Light"/>
+        <a:font script="Hant" typeface="新細明體"/>
+        <a:font script="Arab" typeface="Times New Roman"/>
+        <a:font script="Hebr" typeface="Times New Roman"/>
+        <a:font script="Thai" typeface="Angsana New"/>
+        <a:font script="Ethi" typeface="Nyala"/>
+        <a:font script="Beng" typeface="Vrinda"/>
+        <a:font script="Gujr" typeface="Shruti"/>
+        <a:font script="Khmr" typeface="MoolBoran"/>
+        <a:font script="Knda" typeface="Tunga"/>
+        <a:font script="Guru" typeface="Raavi"/>
+        <a:font script="Cans" typeface="Euphemia"/>
+        <a:font script="Cher" typeface="Plantagenet Cherokee"/>
+        <a:font script="Yiii" typeface="Microsoft Yi Baiti"/>
+        <a:font script="Tibt" typeface="Microsoft Himalaya"/>
+        <a:font script="Thaa" typeface="MV Boli"/>
+        <a:font script="Deva" typeface="Mangal"/>
+        <a:font script="Telu" typeface="Gautami"/>
+        <a:font script="Taml" typeface="Latha"/>
+        <a:font script="Syrc" typeface="Estrangelo Edessa"/>
+        <a:font script="Orya" typeface="Kalinga"/>
+        <a:font script="Mlym" typeface="Kartika"/>
+        <a:font script="Laoo" typeface="DokChampa"/>
+        <a:font script="Sinh" typeface="Iskoola Pota"/>
+        <a:font script="Mong" typeface="Mongolian Baiti"/>
+        <a:font script="Viet" typeface="Times New Roman"/>
+        <a:font script="Uigh" typeface="Microsoft Uighur"/>
+        <a:font script="Geor" typeface="Sylfaen"/>
+        <a:font script="Armn" typeface="Arial"/>
+        <a:font script="Bugi" typeface="Leelawadee UI"/>
+        <a:font script="Bopo" typeface="Microsoft JhengHei"/>
+        <a:font script="Java" typeface="Javanese Text"/>
+        <a:font script="Lisu" typeface="Segoe UI"/>
+        <a:font script="Mymr" typeface="Myanmar Text"/>
+        <a:font script="Nkoo" typeface="Ebrima"/>
+        <a:font script="Olck" typeface="Nirmala UI"/>
+        <a:font script="Osma" typeface="Ebrima"/>
+        <a:font script="Phag" typeface="Phagspa"/>
+        <a:font script="Syrn" typeface="Estrangelo Edessa"/>
+        <a:font script="Syrj" typeface="Estrangelo Edessa"/>
+        <a:font script="Syre" typeface="Estrangelo Edessa"/>
+        <a:font script="Sora" typeface="Nirmala UI"/>
+        <a:font script="Tale" typeface="Microsoft Tai Le"/>
+        <a:font script="Talu" typeface="Microsoft New Tai Lue"/>
+        <a:font script="Tfng" typeface="Ebrima"/>
+      </a:majorFont>
+      <a:minorFont>
+        <a:latin typeface="Aptos" panose="02110004020202020204"/>
+        <a:ea typeface=""/>
+        <a:cs typeface=""/>
+        <a:font script="Jpan" typeface="游ゴシック"/>
+        <a:font script="Hang" typeface="맑은 고딕"/>
+        <a:font script="Hans" typeface="等线"/>
+        <a:font script="Hant" typeface="新細明體"/>
+        <a:font script="Arab" typeface="Arial"/>
+        <a:font script="Hebr" typeface="Arial"/>
+        <a:font script="Thai" typeface="Cordia New"/>
+        <a:font script="Ethi" typeface="Nyala"/>
+        <a:font script="Beng" typeface="Vrinda"/>
+        <a:font script="Gujr" typeface="Shruti"/>
+        <a:font script="Khmr" typeface="DaunPenh"/>
+        <a:font script="Knda" typeface="Tunga"/>
+        <a:font script="Guru" typeface="Raavi"/>
+        <a:font script="Cans" typeface="Euphemia"/>
+        <a:font script="Cher" typeface="Plantagenet Cherokee"/>
+        <a:font script="Yiii" typeface="Microsoft Yi Baiti"/>
+        <a:font script="Tibt" typeface="Microsoft Himalaya"/>
+        <a:font script="Thaa" typeface="MV Boli"/>
+        <a:font script="Deva" typeface="Mangal"/>
+        <a:font script="Telu" typeface="Gautami"/>
+        <a:font script="Taml" typeface="Latha"/>
+        <a:font script="Syrc" typeface="Estrangelo Edessa"/>
+        <a:font script="Orya" typeface="Kalinga"/>
+        <a:font script="Mlym" typeface="Kartika"/>
+        <a:font script="Laoo" typeface="DokChampa"/>
+        <a:font script="Sinh" typeface="Iskoola Pota"/>
+        <a:font script="Mong" typeface="Mongolian Baiti"/>
+        <a:font script="Viet" typeface="Arial"/>
+        <a:font script="Uigh" typeface="Microsoft Uighur"/>
+        <a:font script="Geor" typeface="Sylfaen"/>
+        <a:font script="Armn" typeface="Arial"/>
+        <a:font script="Bugi" typeface="Leelawadee UI"/>
+        <a:font script="Bopo" typeface="Microsoft JhengHei"/>
+        <a:font script="Java" typeface="Javanese Text"/>
+        <a:font script="Lisu" typeface="Segoe UI"/>
+        <a:font script="Mymr" typeface="Myanmar Text"/>
+        <a:font script="Nkoo" typeface="Ebrima"/>
+        <a:font script="Olck" typeface="Nirmala UI"/>
+        <a:font script="Osma" typeface="Ebrima"/>
+        <a:font script="Phag" typeface="Phagspa"/>
+        <a:font script="Syrn" typeface="Estrangelo Edessa"/>
+        <a:font script="Syrj" typeface="Estrangelo Edessa"/>
+        <a:font script="Syre" typeface="Estrangelo Edessa"/>
+        <a:font script="Sora" typeface="Nirmala UI"/>
+        <a:font script="Tale" typeface="Microsoft Tai Le"/>
+        <a:font script="Talu" typeface="Microsoft New Tai Lue"/>
+        <a:font script="Tfng" typeface="Ebrima"/>
+      </a:minorFont>
+    </a:fontScheme>
+    <a:fmtScheme name="Office">
+      <a:fillStyleLst>
+        <a:solidFill>
+          <a:schemeClr val="phClr"/>
+        </a:solidFill>
+        <a:gradFill rotWithShape="1">
+          <a:gsLst>
+            <a:gs pos="0">
+              <a:schemeClr val="phClr">
+                <a:lumMod val="110000"/>
+                <a:satMod val="105000"/>
+                <a:tint val="67000"/>
+              </a:schemeClr>
+            </a:gs>
+            <a:gs pos="50000">
+              <a:schemeClr val="phClr">
+                <a:lumMod val="105000"/>
+                <a:satMod val="103000"/>
+                <a:tint val="73000"/>
+              </a:schemeClr>
+            </a:gs>
+            <a:gs pos="100000">
+              <a:schemeClr val="phClr">
+                <a:lumMod val="105000"/>
+                <a:satMod val="109000"/>
+                <a:tint val="81000"/>
+              </a:schemeClr>
+            </a:gs>
+          </a:gsLst>
+          <a:lin ang="5400000" scaled="0"/>
+        </a:gradFill>
+        <a:gradFill rotWithShape="1">
+          <a:gsLst>
+            <a:gs pos="0">
+              <a:schemeClr val="phClr">
+                <a:satMod val="103000"/>
+                <a:lumMod val="102000"/>
+                <a:tint val="94000"/>
+              </a:schemeClr>
+            </a:gs>
+            <a:gs pos="50000">
+              <a:schemeClr val="phClr">
+                <a:satMod val="110000"/>
+                <a:lumMod val="100000"/>
+                <a:shade val="100000"/>
+              </a:schemeClr>
+            </a:gs>
+            <a:gs pos="100000">
+              <a:schemeClr val="phClr">
+                <a:lumMod val="99000"/>
+                <a:satMod val="120000"/>
+                <a:shade val="78000"/>
+              </a:schemeClr>
+            </a:gs>
+          </a:gsLst>
+          <a:lin ang="5400000" scaled="0"/>
+        </a:gradFill>
+      </a:fillStyleLst>
+      <a:lnStyleLst>
+        <a:ln w="12700" cap="flat" cmpd="sng" algn="ctr">
+          <a:solidFill>
+            <a:schemeClr val="phClr"/>
+          </a:solidFill>
+          <a:prstDash val="solid"/>
+          <a:miter lim="800000"/>
+        </a:ln>
+        <a:ln w="19050" cap="flat" cmpd="sng" algn="ctr">
+          <a:solidFill>
+            <a:schemeClr val="phClr"/>
+          </a:solidFill>
+          <a:prstDash val="solid"/>
+          <a:miter lim="800000"/>
+        </a:ln>
+        <a:ln w="25400" cap="flat" cmpd="sng" algn="ctr">
+          <a:solidFill>
+            <a:schemeClr val="phClr"/>
+          </a:solidFill>
+          <a:prstDash val="solid"/>
+          <a:miter lim="800000"/>
+        </a:ln>
+      </a:lnStyleLst>
+      <a:effectStyleLst>
+        <a:effectStyle>
+          <a:effectLst/>
+        </a:effectStyle>
+        <a:effectStyle>
+          <a:effectLst/>
+        </a:effectStyle>
+        <a:effectStyle>
+          <a:effectLst>
+            <a:outerShdw blurRad="57150" dist="19050" dir="5400000" algn="ctr" rotWithShape="0">
+              <a:srgbClr val="000000">
+                <a:alpha val="63000"/>
+              </a:srgbClr>
+            </a:outerShdw>
+          </a:effectLst>
+        </a:effectStyle>
+      </a:effectStyleLst>
+      <a:bgFillStyleLst>
+        <a:solidFill>
+          <a:schemeClr val="phClr"/>
+        </a:solidFill>
+        <a:solidFill>
+          <a:schemeClr val="phClr">
+            <a:tint val="95000"/>
+            <a:satMod val="170000"/>
+          </a:schemeClr>
+        </a:solidFill>
+        <a:gradFill rotWithShape="1">
+          <a:gsLst>
+            <a:gs pos="0">
+              <a:schemeClr val="phClr">
+                <a:tint val="93000"/>
+                <a:satMod val="150000"/>
+                <a:shade val="98000"/>
+                <a:lumMod val="102000"/>
+              </a:schemeClr>
+            </a:gs>
+            <a:gs pos="50000">
+              <a:schemeClr val="phClr">
+                <a:tint val="98000"/>
+                <a:satMod val="130000"/>
+                <a:shade val="90000"/>
+                <a:lumMod val="103000"/>
+              </a:schemeClr>
+            </a:gs>
+            <a:gs pos="100000">
+              <a:schemeClr val="phClr">
+                <a:shade val="63000"/>
+                <a:satMod val="120000"/>
+              </a:schemeClr>
+            </a:gs>
+          </a:gsLst>
+          <a:lin ang="5400000" scaled="0"/>
+        </a:gradFill>
+      </a:bgFillStyleLst>
+    </a:fmtScheme>
+  </a:themeElements>
+  <a:objectDefaults>
+    <a:lnDef>
+      <a:spPr/>
+      <a:bodyPr/>
+      <a:lstStyle/>
+      <a:style>
+        <a:lnRef idx="2">
+          <a:schemeClr val="accent1"/>
+        </a:lnRef>
+        <a:fillRef idx="0">
+          <a:schemeClr val="accent1"/>
+        </a:fillRef>
+        <a:effectRef idx="1">
+          <a:schemeClr val="accent1"/>
+        </a:effectRef>
+        <a:fontRef idx="minor">
+          <a:schemeClr val="tx1"/>
+        </a:fontRef>
+      </a:style>
+    </a:lnDef>
+  </a:objectDefaults>
+  <a:extraClrSchemeLst/>
+  <a:extLst>
+    <a:ext uri="{05A4C25C-085E-4340-85A3-A5531E510DB2}">
+      <thm15:themeFamily xmlns:thm15="http://schemas.microsoft.com/office/thememl/2012/main" name="Office Theme" id="{2E142A2C-CD16-42D6-873A-C26D2A0506FA}" vid="{1BDDFF52-6CD6-40A5-AB3C-68EB2F1E4D0A}"/>
+    </a:ext>
+  </a:extLst>
+</a:theme>
 </file>
--- a/content/iitb/cover.pptx
+++ b/content/iitb/cover.pptx
@@ -5,11 +5,10 @@
     <p:sldMasterId id="2147483660" r:id="rId1"/>
   </p:sldMasterIdLst>
   <p:notesMasterIdLst>
-    <p:notesMasterId r:id="rId4"/>
+    <p:notesMasterId r:id="rId3"/>
   </p:notesMasterIdLst>
   <p:sldIdLst>
-    <p:sldId id="256" r:id="rId2"/>
-    <p:sldId id="257" r:id="rId3"/>
+    <p:sldId id="257" r:id="rId2"/>
   </p:sldIdLst>
   <p:sldSz cx="9144000" cy="6400800"/>
   <p:notesSz cx="6858000" cy="9144000"/>
@@ -530,7 +529,7 @@
           <a:p>
             <a:fld id="{A624094C-0284-4D41-AFC6-B2EE26AC05FE}" type="slidenum">
               <a:rPr lang="en-US" smtClean="0"/>
-              <a:t>2</a:t>
+              <a:t>1</a:t>
             </a:fld>
             <a:endParaRPr lang="en-US"/>
           </a:p>
@@ -3410,1276 +3409,6 @@
           <a:chExt cx="0" cy="0"/>
         </a:xfrm>
       </p:grpSpPr>
-      <p:sp>
-        <p:nvSpPr>
-          <p:cNvPr id="34" name="Rectangle 33">
-            <a:extLst>
-              <a:ext uri="{FF2B5EF4-FFF2-40B4-BE49-F238E27FC236}">
-                <a16:creationId xmlns:a16="http://schemas.microsoft.com/office/drawing/2014/main" id="{9DB13107-7863-B591-4390-59FF785BD080}"/>
-              </a:ext>
-            </a:extLst>
-          </p:cNvPr>
-          <p:cNvSpPr>
-            <a:spLocks noGrp="1" noRot="1" noMove="1" noResize="1" noEditPoints="1" noAdjustHandles="1" noChangeArrowheads="1" noChangeShapeType="1"/>
-          </p:cNvSpPr>
-          <p:nvPr/>
-        </p:nvSpPr>
-        <p:spPr>
-          <a:xfrm>
-            <a:off x="0" y="0"/>
-            <a:ext cx="9144000" cy="6400800"/>
-          </a:xfrm>
-          <a:prstGeom prst="rect">
-            <a:avLst/>
-          </a:prstGeom>
-          <a:solidFill>
-            <a:schemeClr val="tx1">
-              <a:lumMod val="50000"/>
-              <a:lumOff val="50000"/>
-            </a:schemeClr>
-          </a:solidFill>
-          <a:ln>
-            <a:noFill/>
-          </a:ln>
-        </p:spPr>
-        <p:style>
-          <a:lnRef idx="2">
-            <a:schemeClr val="accent1">
-              <a:shade val="15000"/>
-            </a:schemeClr>
-          </a:lnRef>
-          <a:fillRef idx="1">
-            <a:schemeClr val="accent1"/>
-          </a:fillRef>
-          <a:effectRef idx="0">
-            <a:schemeClr val="accent1"/>
-          </a:effectRef>
-          <a:fontRef idx="minor">
-            <a:schemeClr val="lt1"/>
-          </a:fontRef>
-        </p:style>
-        <p:txBody>
-          <a:bodyPr rtlCol="0" anchor="ctr"/>
-          <a:lstStyle/>
-          <a:p>
-            <a:pPr algn="ctr"/>
-            <a:endParaRPr lang="en-US" dirty="0"/>
-          </a:p>
-        </p:txBody>
-      </p:sp>
-      <p:sp>
-        <p:nvSpPr>
-          <p:cNvPr id="42" name="Rectangle 41">
-            <a:extLst>
-              <a:ext uri="{FF2B5EF4-FFF2-40B4-BE49-F238E27FC236}">
-                <a16:creationId xmlns:a16="http://schemas.microsoft.com/office/drawing/2014/main" id="{CC392CA5-B258-0BDD-7C6B-91AC99CA9B78}"/>
-              </a:ext>
-            </a:extLst>
-          </p:cNvPr>
-          <p:cNvSpPr/>
-          <p:nvPr/>
-        </p:nvSpPr>
-        <p:spPr>
-          <a:xfrm>
-            <a:off x="45720" y="3224674"/>
-            <a:ext cx="9052560" cy="3136392"/>
-          </a:xfrm>
-          <a:prstGeom prst="rect">
-            <a:avLst/>
-          </a:prstGeom>
-          <a:solidFill>
-            <a:schemeClr val="bg1"/>
-          </a:solidFill>
-          <a:ln>
-            <a:noFill/>
-          </a:ln>
-        </p:spPr>
-        <p:style>
-          <a:lnRef idx="2">
-            <a:schemeClr val="accent1">
-              <a:shade val="15000"/>
-            </a:schemeClr>
-          </a:lnRef>
-          <a:fillRef idx="1">
-            <a:schemeClr val="accent1"/>
-          </a:fillRef>
-          <a:effectRef idx="0">
-            <a:schemeClr val="accent1"/>
-          </a:effectRef>
-          <a:fontRef idx="minor">
-            <a:schemeClr val="lt1"/>
-          </a:fontRef>
-        </p:style>
-        <p:txBody>
-          <a:bodyPr rtlCol="0" anchor="ctr"/>
-          <a:lstStyle/>
-          <a:p>
-            <a:pPr algn="ctr"/>
-            <a:endParaRPr lang="en-US"/>
-          </a:p>
-        </p:txBody>
-      </p:sp>
-      <p:sp>
-        <p:nvSpPr>
-          <p:cNvPr id="41" name="Rectangle 40">
-            <a:extLst>
-              <a:ext uri="{FF2B5EF4-FFF2-40B4-BE49-F238E27FC236}">
-                <a16:creationId xmlns:a16="http://schemas.microsoft.com/office/drawing/2014/main" id="{713EC8C7-60EA-14B4-32F2-D95A563A694D}"/>
-              </a:ext>
-            </a:extLst>
-          </p:cNvPr>
-          <p:cNvSpPr/>
-          <p:nvPr/>
-        </p:nvSpPr>
-        <p:spPr>
-          <a:xfrm>
-            <a:off x="45720" y="45720"/>
-            <a:ext cx="9052560" cy="3136392"/>
-          </a:xfrm>
-          <a:prstGeom prst="rect">
-            <a:avLst/>
-          </a:prstGeom>
-          <a:solidFill>
-            <a:schemeClr val="bg1"/>
-          </a:solidFill>
-          <a:ln>
-            <a:noFill/>
-          </a:ln>
-        </p:spPr>
-        <p:style>
-          <a:lnRef idx="2">
-            <a:schemeClr val="accent1">
-              <a:shade val="15000"/>
-            </a:schemeClr>
-          </a:lnRef>
-          <a:fillRef idx="1">
-            <a:schemeClr val="accent1"/>
-          </a:fillRef>
-          <a:effectRef idx="0">
-            <a:schemeClr val="accent1"/>
-          </a:effectRef>
-          <a:fontRef idx="minor">
-            <a:schemeClr val="lt1"/>
-          </a:fontRef>
-        </p:style>
-        <p:txBody>
-          <a:bodyPr rtlCol="0" anchor="ctr"/>
-          <a:lstStyle/>
-          <a:p>
-            <a:pPr algn="ctr"/>
-            <a:endParaRPr lang="en-US"/>
-          </a:p>
-        </p:txBody>
-      </p:sp>
-      <p:sp>
-        <p:nvSpPr>
-          <p:cNvPr id="30" name="Rectangle 29">
-            <a:extLst>
-              <a:ext uri="{FF2B5EF4-FFF2-40B4-BE49-F238E27FC236}">
-                <a16:creationId xmlns:a16="http://schemas.microsoft.com/office/drawing/2014/main" id="{B5649794-0E45-E60D-98C0-F23FE9C918E5}"/>
-              </a:ext>
-            </a:extLst>
-          </p:cNvPr>
-          <p:cNvSpPr/>
-          <p:nvPr/>
-        </p:nvSpPr>
-        <p:spPr>
-          <a:xfrm>
-            <a:off x="1094279" y="5110636"/>
-            <a:ext cx="3404768" cy="472571"/>
-          </a:xfrm>
-          <a:prstGeom prst="rect">
-            <a:avLst/>
-          </a:prstGeom>
-          <a:solidFill>
-            <a:schemeClr val="bg1"/>
-          </a:solidFill>
-          <a:ln w="57150">
-            <a:solidFill>
-              <a:srgbClr val="C00000"/>
-            </a:solidFill>
-          </a:ln>
-        </p:spPr>
-        <p:style>
-          <a:lnRef idx="2">
-            <a:schemeClr val="accent1">
-              <a:shade val="15000"/>
-            </a:schemeClr>
-          </a:lnRef>
-          <a:fillRef idx="1">
-            <a:schemeClr val="accent1"/>
-          </a:fillRef>
-          <a:effectRef idx="0">
-            <a:schemeClr val="accent1"/>
-          </a:effectRef>
-          <a:fontRef idx="minor">
-            <a:schemeClr val="lt1"/>
-          </a:fontRef>
-        </p:style>
-        <p:txBody>
-          <a:bodyPr rtlCol="0" anchor="ctr"/>
-          <a:lstStyle/>
-          <a:p>
-            <a:pPr algn="ctr"/>
-            <a:endParaRPr lang="en-US"/>
-          </a:p>
-        </p:txBody>
-      </p:sp>
-      <p:pic>
-        <p:nvPicPr>
-          <p:cNvPr id="4" name="Picture 3">
-            <a:extLst>
-              <a:ext uri="{FF2B5EF4-FFF2-40B4-BE49-F238E27FC236}">
-                <a16:creationId xmlns:a16="http://schemas.microsoft.com/office/drawing/2014/main" id="{4CCA7EF6-D842-76DB-CCFE-1D4718975278}"/>
-              </a:ext>
-            </a:extLst>
-          </p:cNvPr>
-          <p:cNvPicPr>
-            <a:picLocks noChangeAspect="1"/>
-          </p:cNvPicPr>
-          <p:nvPr/>
-        </p:nvPicPr>
-        <p:blipFill rotWithShape="1">
-          <a:blip r:embed="rId2">
-            <a:extLst>
-              <a:ext uri="{BEBA8EAE-BF5A-486C-A8C5-ECC9F3942E4B}">
-                <a14:imgProps xmlns:a14="http://schemas.microsoft.com/office/drawing/2010/main">
-                  <a14:imgLayer r:embed="rId3">
-                    <a14:imgEffect>
-                      <a14:saturation sat="400000"/>
-                    </a14:imgEffect>
-                  </a14:imgLayer>
-                </a14:imgProps>
-              </a:ext>
-            </a:extLst>
-          </a:blip>
-          <a:srcRect l="12978" t="8217" r="3927" b="10808"/>
-          <a:stretch/>
-        </p:blipFill>
-        <p:spPr>
-          <a:xfrm>
-            <a:off x="1030529" y="3318145"/>
-            <a:ext cx="4086330" cy="2110036"/>
-          </a:xfrm>
-          <a:prstGeom prst="rect">
-            <a:avLst/>
-          </a:prstGeom>
-        </p:spPr>
-      </p:pic>
-      <p:pic>
-        <p:nvPicPr>
-          <p:cNvPr id="7" name="Picture 2">
-            <a:extLst>
-              <a:ext uri="{FF2B5EF4-FFF2-40B4-BE49-F238E27FC236}">
-                <a16:creationId xmlns:a16="http://schemas.microsoft.com/office/drawing/2014/main" id="{D54FD9AD-C2C7-1F77-4D44-44E90AC1CA72}"/>
-              </a:ext>
-            </a:extLst>
-          </p:cNvPr>
-          <p:cNvPicPr>
-            <a:picLocks noChangeAspect="1" noChangeArrowheads="1"/>
-          </p:cNvPicPr>
-          <p:nvPr/>
-        </p:nvPicPr>
-        <p:blipFill>
-          <a:blip r:embed="rId4"/>
-          <a:srcRect l="485" r="485"/>
-          <a:stretch/>
-        </p:blipFill>
-        <p:spPr bwMode="auto">
-          <a:xfrm>
-            <a:off x="1630593" y="454124"/>
-            <a:ext cx="3232372" cy="2544633"/>
-          </a:xfrm>
-          <a:prstGeom prst="rect">
-            <a:avLst/>
-          </a:prstGeom>
-          <a:noFill/>
-          <a:extLst>
-            <a:ext uri="{909E8E84-426E-40DD-AFC4-6F175D3DCCD1}">
-              <a14:hiddenFill xmlns:a14="http://schemas.microsoft.com/office/drawing/2010/main">
-                <a:solidFill>
-                  <a:srgbClr val="FFFFFF"/>
-                </a:solidFill>
-              </a14:hiddenFill>
-            </a:ext>
-          </a:extLst>
-        </p:spPr>
-      </p:pic>
-      <p:pic>
-        <p:nvPicPr>
-          <p:cNvPr id="8" name="Picture 4" descr="Free Light Cliparts, Download Free Light Cliparts png images, Free ClipArts  on Clipart Library">
-            <a:extLst>
-              <a:ext uri="{FF2B5EF4-FFF2-40B4-BE49-F238E27FC236}">
-                <a16:creationId xmlns:a16="http://schemas.microsoft.com/office/drawing/2014/main" id="{9E9680D7-F700-98A7-0AD5-4CDD3288840A}"/>
-              </a:ext>
-            </a:extLst>
-          </p:cNvPr>
-          <p:cNvPicPr>
-            <a:picLocks noChangeAspect="1" noChangeArrowheads="1"/>
-          </p:cNvPicPr>
-          <p:nvPr/>
-        </p:nvPicPr>
-        <p:blipFill>
-          <a:blip r:embed="rId5">
-            <a:extLst>
-              <a:ext uri="{28A0092B-C50C-407E-A947-70E740481C1C}">
-                <a14:useLocalDpi xmlns:a14="http://schemas.microsoft.com/office/drawing/2010/main" val="0"/>
-              </a:ext>
-            </a:extLst>
-          </a:blip>
-          <a:srcRect/>
-          <a:stretch>
-            <a:fillRect/>
-          </a:stretch>
-        </p:blipFill>
-        <p:spPr bwMode="auto">
-          <a:xfrm>
-            <a:off x="6828170" y="315852"/>
-            <a:ext cx="1372230" cy="1698304"/>
-          </a:xfrm>
-          <a:prstGeom prst="rect">
-            <a:avLst/>
-          </a:prstGeom>
-          <a:noFill/>
-          <a:extLst>
-            <a:ext uri="{909E8E84-426E-40DD-AFC4-6F175D3DCCD1}">
-              <a14:hiddenFill xmlns:a14="http://schemas.microsoft.com/office/drawing/2010/main">
-                <a:solidFill>
-                  <a:srgbClr val="FFFFFF"/>
-                </a:solidFill>
-              </a14:hiddenFill>
-            </a:ext>
-          </a:extLst>
-        </p:spPr>
-      </p:pic>
-      <p:cxnSp>
-        <p:nvCxnSpPr>
-          <p:cNvPr id="9" name="Straight Arrow Connector 8">
-            <a:extLst>
-              <a:ext uri="{FF2B5EF4-FFF2-40B4-BE49-F238E27FC236}">
-                <a16:creationId xmlns:a16="http://schemas.microsoft.com/office/drawing/2014/main" id="{AE6E2541-E6DC-5DF4-9689-AC0DE2D39B30}"/>
-              </a:ext>
-            </a:extLst>
-          </p:cNvPr>
-          <p:cNvCxnSpPr>
-            <a:cxnSpLocks/>
-          </p:cNvCxnSpPr>
-          <p:nvPr/>
-        </p:nvCxnSpPr>
-        <p:spPr>
-          <a:xfrm>
-            <a:off x="5064020" y="1408638"/>
-            <a:ext cx="1504121" cy="0"/>
-          </a:xfrm>
-          <a:prstGeom prst="straightConnector1">
-            <a:avLst/>
-          </a:prstGeom>
-          <a:ln w="76200">
-            <a:solidFill>
-              <a:schemeClr val="tx1"/>
-            </a:solidFill>
-            <a:tailEnd type="triangle"/>
-          </a:ln>
-        </p:spPr>
-        <p:style>
-          <a:lnRef idx="1">
-            <a:schemeClr val="dk1"/>
-          </a:lnRef>
-          <a:fillRef idx="0">
-            <a:schemeClr val="dk1"/>
-          </a:fillRef>
-          <a:effectRef idx="0">
-            <a:schemeClr val="dk1"/>
-          </a:effectRef>
-          <a:fontRef idx="minor">
-            <a:schemeClr val="tx1"/>
-          </a:fontRef>
-        </p:style>
-      </p:cxnSp>
-      <p:sp>
-        <p:nvSpPr>
-          <p:cNvPr id="10" name="TextBox 9">
-            <a:extLst>
-              <a:ext uri="{FF2B5EF4-FFF2-40B4-BE49-F238E27FC236}">
-                <a16:creationId xmlns:a16="http://schemas.microsoft.com/office/drawing/2014/main" id="{2E241869-B377-DFA9-0E7B-BE4FB08AC084}"/>
-              </a:ext>
-            </a:extLst>
-          </p:cNvPr>
-          <p:cNvSpPr txBox="1"/>
-          <p:nvPr/>
-        </p:nvSpPr>
-        <p:spPr>
-          <a:xfrm>
-            <a:off x="4877100" y="1514704"/>
-            <a:ext cx="1867245" cy="523220"/>
-          </a:xfrm>
-          <a:prstGeom prst="rect">
-            <a:avLst/>
-          </a:prstGeom>
-          <a:noFill/>
-        </p:spPr>
-        <p:txBody>
-          <a:bodyPr wrap="square" rtlCol="0">
-            <a:spAutoFit/>
-          </a:bodyPr>
-          <a:lstStyle/>
-          <a:p>
-            <a:pPr algn="ctr"/>
-            <a:r>
-              <a:rPr lang="en-IN" sz="1400" dirty="0">
-                <a:latin typeface="Albert Sans Medium" pitchFamily="2" charset="77"/>
-              </a:rPr>
-              <a:t>Takes some time for it to turn on</a:t>
-            </a:r>
-          </a:p>
-        </p:txBody>
-      </p:sp>
-      <p:grpSp>
-        <p:nvGrpSpPr>
-          <p:cNvPr id="12" name="Group 11">
-            <a:extLst>
-              <a:ext uri="{FF2B5EF4-FFF2-40B4-BE49-F238E27FC236}">
-                <a16:creationId xmlns:a16="http://schemas.microsoft.com/office/drawing/2014/main" id="{5DA0E6DE-4E39-9123-BBB0-3CF7328984DE}"/>
-              </a:ext>
-            </a:extLst>
-          </p:cNvPr>
-          <p:cNvGrpSpPr/>
-          <p:nvPr/>
-        </p:nvGrpSpPr>
-        <p:grpSpPr>
-          <a:xfrm>
-            <a:off x="1094280" y="3892633"/>
-            <a:ext cx="7010865" cy="894389"/>
-            <a:chOff x="2011244" y="4777171"/>
-            <a:chExt cx="7010865" cy="894389"/>
-          </a:xfrm>
-        </p:grpSpPr>
-        <p:cxnSp>
-          <p:nvCxnSpPr>
-            <p:cNvPr id="16" name="Straight Arrow Connector 15">
-              <a:extLst>
-                <a:ext uri="{FF2B5EF4-FFF2-40B4-BE49-F238E27FC236}">
-                  <a16:creationId xmlns:a16="http://schemas.microsoft.com/office/drawing/2014/main" id="{EEE4AD03-C82E-689A-9DA8-7976B6B136E4}"/>
-                </a:ext>
-              </a:extLst>
-            </p:cNvPr>
-            <p:cNvCxnSpPr>
-              <a:cxnSpLocks/>
-            </p:cNvCxnSpPr>
-            <p:nvPr/>
-          </p:nvCxnSpPr>
-          <p:spPr>
-            <a:xfrm flipV="1">
-              <a:off x="2011244" y="5317536"/>
-              <a:ext cx="6809537" cy="0"/>
-            </a:xfrm>
-            <a:prstGeom prst="straightConnector1">
-              <a:avLst/>
-            </a:prstGeom>
-            <a:ln w="57150">
-              <a:solidFill>
-                <a:schemeClr val="tx1"/>
-              </a:solidFill>
-              <a:tailEnd type="triangle"/>
-            </a:ln>
-          </p:spPr>
-          <p:style>
-            <a:lnRef idx="1">
-              <a:schemeClr val="accent1"/>
-            </a:lnRef>
-            <a:fillRef idx="0">
-              <a:schemeClr val="accent1"/>
-            </a:fillRef>
-            <a:effectRef idx="0">
-              <a:schemeClr val="accent1"/>
-            </a:effectRef>
-            <a:fontRef idx="minor">
-              <a:schemeClr val="tx1"/>
-            </a:fontRef>
-          </p:style>
-        </p:cxnSp>
-        <p:sp>
-          <p:nvSpPr>
-            <p:cNvPr id="18" name="TextBox 17">
-              <a:extLst>
-                <a:ext uri="{FF2B5EF4-FFF2-40B4-BE49-F238E27FC236}">
-                  <a16:creationId xmlns:a16="http://schemas.microsoft.com/office/drawing/2014/main" id="{EDE4DF71-8553-623E-24ED-9C9D1AD10B10}"/>
-                </a:ext>
-              </a:extLst>
-            </p:cNvPr>
-            <p:cNvSpPr txBox="1"/>
-            <p:nvPr/>
-          </p:nvSpPr>
-          <p:spPr>
-            <a:xfrm>
-              <a:off x="3728298" y="4803140"/>
-              <a:ext cx="1231426" cy="307777"/>
-            </a:xfrm>
-            <a:prstGeom prst="rect">
-              <a:avLst/>
-            </a:prstGeom>
-            <a:noFill/>
-          </p:spPr>
-          <p:txBody>
-            <a:bodyPr wrap="none" rtlCol="0">
-              <a:spAutoFit/>
-            </a:bodyPr>
-            <a:lstStyle/>
-            <a:p>
-              <a:pPr algn="ctr"/>
-              <a:r>
-                <a:rPr lang="en-IN" sz="1400" dirty="0">
-                  <a:solidFill>
-                    <a:srgbClr val="FF0000"/>
-                  </a:solidFill>
-                  <a:latin typeface="Albert Sans Medium" pitchFamily="2" charset="77"/>
-                </a:rPr>
-                <a:t>Button Press</a:t>
-              </a:r>
-            </a:p>
-          </p:txBody>
-        </p:sp>
-        <p:sp>
-          <p:nvSpPr>
-            <p:cNvPr id="19" name="Oval 18">
-              <a:extLst>
-                <a:ext uri="{FF2B5EF4-FFF2-40B4-BE49-F238E27FC236}">
-                  <a16:creationId xmlns:a16="http://schemas.microsoft.com/office/drawing/2014/main" id="{A8EC3F9A-2C4E-C852-EA94-3FFCEA0854CF}"/>
-                </a:ext>
-              </a:extLst>
-            </p:cNvPr>
-            <p:cNvSpPr/>
-            <p:nvPr/>
-          </p:nvSpPr>
-          <p:spPr>
-            <a:xfrm>
-              <a:off x="4163743" y="5137282"/>
-              <a:ext cx="360537" cy="360508"/>
-            </a:xfrm>
-            <a:prstGeom prst="ellipse">
-              <a:avLst/>
-            </a:prstGeom>
-            <a:solidFill>
-              <a:schemeClr val="bg1"/>
-            </a:solidFill>
-            <a:ln w="38100">
-              <a:solidFill>
-                <a:srgbClr val="FF0000"/>
-              </a:solidFill>
-            </a:ln>
-          </p:spPr>
-          <p:style>
-            <a:lnRef idx="2">
-              <a:schemeClr val="accent1">
-                <a:shade val="50000"/>
-              </a:schemeClr>
-            </a:lnRef>
-            <a:fillRef idx="1">
-              <a:schemeClr val="accent1"/>
-            </a:fillRef>
-            <a:effectRef idx="0">
-              <a:schemeClr val="accent1"/>
-            </a:effectRef>
-            <a:fontRef idx="minor">
-              <a:schemeClr val="lt1"/>
-            </a:fontRef>
-          </p:style>
-          <p:txBody>
-            <a:bodyPr rtlCol="0" anchor="ctr"/>
-            <a:lstStyle/>
-            <a:p>
-              <a:pPr algn="ctr"/>
-              <a:endParaRPr lang="en-IN" dirty="0"/>
-            </a:p>
-          </p:txBody>
-        </p:sp>
-        <p:sp>
-          <p:nvSpPr>
-            <p:cNvPr id="20" name="TextBox 19">
-              <a:extLst>
-                <a:ext uri="{FF2B5EF4-FFF2-40B4-BE49-F238E27FC236}">
-                  <a16:creationId xmlns:a16="http://schemas.microsoft.com/office/drawing/2014/main" id="{3EE34521-0BF4-DE7D-32DD-E81958A3D9EC}"/>
-                </a:ext>
-              </a:extLst>
-            </p:cNvPr>
-            <p:cNvSpPr txBox="1"/>
-            <p:nvPr/>
-          </p:nvSpPr>
-          <p:spPr>
-            <a:xfrm>
-              <a:off x="6943227" y="4777171"/>
-              <a:ext cx="1569660" cy="307777"/>
-            </a:xfrm>
-            <a:prstGeom prst="rect">
-              <a:avLst/>
-            </a:prstGeom>
-            <a:noFill/>
-          </p:spPr>
-          <p:txBody>
-            <a:bodyPr wrap="none" rtlCol="0">
-              <a:spAutoFit/>
-            </a:bodyPr>
-            <a:lstStyle/>
-            <a:p>
-              <a:pPr algn="ctr"/>
-              <a:r>
-                <a:rPr lang="en-IN" sz="1400" dirty="0">
-                  <a:solidFill>
-                    <a:srgbClr val="00B050"/>
-                  </a:solidFill>
-                  <a:latin typeface="Albert Sans Medium" pitchFamily="2" charset="77"/>
-                </a:rPr>
-                <a:t>Light Turning On</a:t>
-              </a:r>
-            </a:p>
-          </p:txBody>
-        </p:sp>
-        <p:sp>
-          <p:nvSpPr>
-            <p:cNvPr id="21" name="TextBox 20">
-              <a:extLst>
-                <a:ext uri="{FF2B5EF4-FFF2-40B4-BE49-F238E27FC236}">
-                  <a16:creationId xmlns:a16="http://schemas.microsoft.com/office/drawing/2014/main" id="{CFC25961-6F31-28C6-9F1D-7CE1823C7123}"/>
-                </a:ext>
-              </a:extLst>
-            </p:cNvPr>
-            <p:cNvSpPr txBox="1"/>
-            <p:nvPr/>
-          </p:nvSpPr>
-          <p:spPr>
-            <a:xfrm>
-              <a:off x="8467149" y="5363783"/>
-              <a:ext cx="554960" cy="307777"/>
-            </a:xfrm>
-            <a:prstGeom prst="rect">
-              <a:avLst/>
-            </a:prstGeom>
-            <a:noFill/>
-          </p:spPr>
-          <p:txBody>
-            <a:bodyPr wrap="none" rtlCol="0">
-              <a:spAutoFit/>
-            </a:bodyPr>
-            <a:lstStyle/>
-            <a:p>
-              <a:r>
-                <a:rPr lang="en-IN" sz="1400" dirty="0">
-                  <a:latin typeface="Albert Sans Medium" pitchFamily="2" charset="77"/>
-                </a:rPr>
-                <a:t>time</a:t>
-              </a:r>
-            </a:p>
-          </p:txBody>
-        </p:sp>
-        <p:sp>
-          <p:nvSpPr>
-            <p:cNvPr id="22" name="Oval 21">
-              <a:extLst>
-                <a:ext uri="{FF2B5EF4-FFF2-40B4-BE49-F238E27FC236}">
-                  <a16:creationId xmlns:a16="http://schemas.microsoft.com/office/drawing/2014/main" id="{58B66B1D-2453-19BF-FA03-DB0D61C214C4}"/>
-                </a:ext>
-              </a:extLst>
-            </p:cNvPr>
-            <p:cNvSpPr/>
-            <p:nvPr/>
-          </p:nvSpPr>
-          <p:spPr>
-            <a:xfrm>
-              <a:off x="7550841" y="5137282"/>
-              <a:ext cx="360537" cy="360508"/>
-            </a:xfrm>
-            <a:prstGeom prst="ellipse">
-              <a:avLst/>
-            </a:prstGeom>
-            <a:solidFill>
-              <a:schemeClr val="bg1"/>
-            </a:solidFill>
-            <a:ln w="38100">
-              <a:solidFill>
-                <a:srgbClr val="00B050"/>
-              </a:solidFill>
-            </a:ln>
-          </p:spPr>
-          <p:style>
-            <a:lnRef idx="2">
-              <a:schemeClr val="accent1">
-                <a:shade val="50000"/>
-              </a:schemeClr>
-            </a:lnRef>
-            <a:fillRef idx="1">
-              <a:schemeClr val="accent1"/>
-            </a:fillRef>
-            <a:effectRef idx="0">
-              <a:schemeClr val="accent1"/>
-            </a:effectRef>
-            <a:fontRef idx="minor">
-              <a:schemeClr val="lt1"/>
-            </a:fontRef>
-          </p:style>
-          <p:txBody>
-            <a:bodyPr rtlCol="0" anchor="ctr"/>
-            <a:lstStyle/>
-            <a:p>
-              <a:pPr algn="ctr"/>
-              <a:endParaRPr lang="en-IN" dirty="0"/>
-            </a:p>
-          </p:txBody>
-        </p:sp>
-      </p:grpSp>
-      <p:grpSp>
-        <p:nvGrpSpPr>
-          <p:cNvPr id="13" name="Group 12">
-            <a:extLst>
-              <a:ext uri="{FF2B5EF4-FFF2-40B4-BE49-F238E27FC236}">
-                <a16:creationId xmlns:a16="http://schemas.microsoft.com/office/drawing/2014/main" id="{FBFCA0B8-1575-2CCC-76E7-007C93B76828}"/>
-              </a:ext>
-            </a:extLst>
-          </p:cNvPr>
-          <p:cNvGrpSpPr/>
-          <p:nvPr/>
-        </p:nvGrpSpPr>
-        <p:grpSpPr>
-          <a:xfrm>
-            <a:off x="4307680" y="4252744"/>
-            <a:ext cx="1720695" cy="809540"/>
-            <a:chOff x="5272944" y="5137282"/>
-            <a:chExt cx="1720695" cy="809540"/>
-          </a:xfrm>
-        </p:grpSpPr>
-        <p:sp>
-          <p:nvSpPr>
-            <p:cNvPr id="14" name="TextBox 13">
-              <a:extLst>
-                <a:ext uri="{FF2B5EF4-FFF2-40B4-BE49-F238E27FC236}">
-                  <a16:creationId xmlns:a16="http://schemas.microsoft.com/office/drawing/2014/main" id="{CE1C7627-B467-AA6F-5BF7-3400076EBC64}"/>
-                </a:ext>
-              </a:extLst>
-            </p:cNvPr>
-            <p:cNvSpPr txBox="1"/>
-            <p:nvPr/>
-          </p:nvSpPr>
-          <p:spPr>
-            <a:xfrm>
-              <a:off x="5453212" y="5423602"/>
-              <a:ext cx="1540427" cy="523220"/>
-            </a:xfrm>
-            <a:prstGeom prst="rect">
-              <a:avLst/>
-            </a:prstGeom>
-            <a:noFill/>
-          </p:spPr>
-          <p:txBody>
-            <a:bodyPr wrap="square" rtlCol="0">
-              <a:spAutoFit/>
-            </a:bodyPr>
-            <a:lstStyle/>
-            <a:p>
-              <a:pPr algn="ctr"/>
-              <a:r>
-                <a:rPr lang="en-IN" sz="1400" dirty="0">
-                  <a:solidFill>
-                    <a:srgbClr val="00B0F0"/>
-                  </a:solidFill>
-                  <a:latin typeface="Albert Sans Medium" pitchFamily="2" charset="77"/>
-                </a:rPr>
-                <a:t>Perceived Time of Button Press</a:t>
-              </a:r>
-            </a:p>
-          </p:txBody>
-        </p:sp>
-        <p:sp>
-          <p:nvSpPr>
-            <p:cNvPr id="15" name="Oval 14">
-              <a:extLst>
-                <a:ext uri="{FF2B5EF4-FFF2-40B4-BE49-F238E27FC236}">
-                  <a16:creationId xmlns:a16="http://schemas.microsoft.com/office/drawing/2014/main" id="{C64DB2E8-9992-F5C6-A9A6-B6E47B438DC7}"/>
-                </a:ext>
-              </a:extLst>
-            </p:cNvPr>
-            <p:cNvSpPr/>
-            <p:nvPr/>
-          </p:nvSpPr>
-          <p:spPr>
-            <a:xfrm>
-              <a:off x="5272944" y="5137282"/>
-              <a:ext cx="360537" cy="360508"/>
-            </a:xfrm>
-            <a:prstGeom prst="ellipse">
-              <a:avLst/>
-            </a:prstGeom>
-            <a:solidFill>
-              <a:schemeClr val="bg1"/>
-            </a:solidFill>
-            <a:ln w="38100">
-              <a:solidFill>
-                <a:srgbClr val="00B0F0"/>
-              </a:solidFill>
-            </a:ln>
-          </p:spPr>
-          <p:style>
-            <a:lnRef idx="2">
-              <a:schemeClr val="accent1">
-                <a:shade val="50000"/>
-              </a:schemeClr>
-            </a:lnRef>
-            <a:fillRef idx="1">
-              <a:schemeClr val="accent1"/>
-            </a:fillRef>
-            <a:effectRef idx="0">
-              <a:schemeClr val="accent1"/>
-            </a:effectRef>
-            <a:fontRef idx="minor">
-              <a:schemeClr val="lt1"/>
-            </a:fontRef>
-          </p:style>
-          <p:txBody>
-            <a:bodyPr rtlCol="0" anchor="ctr"/>
-            <a:lstStyle/>
-            <a:p>
-              <a:pPr algn="ctr"/>
-              <a:endParaRPr lang="en-IN" dirty="0"/>
-            </a:p>
-          </p:txBody>
-        </p:sp>
-      </p:grpSp>
-      <p:pic>
-        <p:nvPicPr>
-          <p:cNvPr id="23" name="Picture 6" descr="Loop - Free interface icons">
-            <a:extLst>
-              <a:ext uri="{FF2B5EF4-FFF2-40B4-BE49-F238E27FC236}">
-                <a16:creationId xmlns:a16="http://schemas.microsoft.com/office/drawing/2014/main" id="{4FF45373-4F7C-E565-D55B-3B95AEDC970D}"/>
-              </a:ext>
-            </a:extLst>
-          </p:cNvPr>
-          <p:cNvPicPr>
-            <a:picLocks noChangeAspect="1" noChangeArrowheads="1"/>
-          </p:cNvPicPr>
-          <p:nvPr/>
-        </p:nvPicPr>
-        <p:blipFill>
-          <a:blip r:embed="rId6">
-            <a:duotone>
-              <a:schemeClr val="accent5">
-                <a:shade val="45000"/>
-                <a:satMod val="135000"/>
-              </a:schemeClr>
-              <a:prstClr val="white"/>
-            </a:duotone>
-            <a:extLst>
-              <a:ext uri="{BEBA8EAE-BF5A-486C-A8C5-ECC9F3942E4B}">
-                <a14:imgProps xmlns:a14="http://schemas.microsoft.com/office/drawing/2010/main">
-                  <a14:imgLayer r:embed="rId7">
-                    <a14:imgEffect>
-                      <a14:artisticPhotocopy/>
-                    </a14:imgEffect>
-                    <a14:imgEffect>
-                      <a14:saturation sat="400000"/>
-                    </a14:imgEffect>
-                  </a14:imgLayer>
-                </a14:imgProps>
-              </a:ext>
-              <a:ext uri="{28A0092B-C50C-407E-A947-70E740481C1C}">
-                <a14:useLocalDpi xmlns:a14="http://schemas.microsoft.com/office/drawing/2010/main" val="0"/>
-              </a:ext>
-            </a:extLst>
-          </a:blip>
-          <a:srcRect/>
-          <a:stretch>
-            <a:fillRect/>
-          </a:stretch>
-        </p:blipFill>
-        <p:spPr bwMode="auto">
-          <a:xfrm flipV="1">
-            <a:off x="2158774" y="950932"/>
-            <a:ext cx="553435" cy="553435"/>
-          </a:xfrm>
-          <a:prstGeom prst="rect">
-            <a:avLst/>
-          </a:prstGeom>
-          <a:noFill/>
-          <a:ln>
-            <a:noFill/>
-          </a:ln>
-          <a:extLst>
-            <a:ext uri="{909E8E84-426E-40DD-AFC4-6F175D3DCCD1}">
-              <a14:hiddenFill xmlns:a14="http://schemas.microsoft.com/office/drawing/2010/main">
-                <a:solidFill>
-                  <a:srgbClr val="FFFFFF"/>
-                </a:solidFill>
-              </a14:hiddenFill>
-            </a:ext>
-          </a:extLst>
-        </p:spPr>
-      </p:pic>
-      <p:sp>
-        <p:nvSpPr>
-          <p:cNvPr id="24" name="Thought Bubble: Cloud 1039">
-            <a:extLst>
-              <a:ext uri="{FF2B5EF4-FFF2-40B4-BE49-F238E27FC236}">
-                <a16:creationId xmlns:a16="http://schemas.microsoft.com/office/drawing/2014/main" id="{908FF0F2-1C81-7037-BD2A-DB6145920401}"/>
-              </a:ext>
-            </a:extLst>
-          </p:cNvPr>
-          <p:cNvSpPr/>
-          <p:nvPr/>
-        </p:nvSpPr>
-        <p:spPr>
-          <a:xfrm rot="20412380" flipH="1">
-            <a:off x="770485" y="199986"/>
-            <a:ext cx="1370469" cy="1085196"/>
-          </a:xfrm>
-          <a:prstGeom prst="cloudCallout">
-            <a:avLst/>
-          </a:prstGeom>
-          <a:solidFill>
-            <a:schemeClr val="bg1">
-              <a:lumMod val="95000"/>
-            </a:schemeClr>
-          </a:solidFill>
-          <a:ln w="19050">
-            <a:solidFill>
-              <a:schemeClr val="bg2">
-                <a:lumMod val="50000"/>
-              </a:schemeClr>
-            </a:solidFill>
-          </a:ln>
-        </p:spPr>
-        <p:style>
-          <a:lnRef idx="2">
-            <a:schemeClr val="accent1">
-              <a:shade val="50000"/>
-            </a:schemeClr>
-          </a:lnRef>
-          <a:fillRef idx="1">
-            <a:schemeClr val="accent1"/>
-          </a:fillRef>
-          <a:effectRef idx="0">
-            <a:schemeClr val="accent1"/>
-          </a:effectRef>
-          <a:fontRef idx="minor">
-            <a:schemeClr val="lt1"/>
-          </a:fontRef>
-        </p:style>
-        <p:txBody>
-          <a:bodyPr rtlCol="0" anchor="ctr"/>
-          <a:lstStyle/>
-          <a:p>
-            <a:pPr algn="ctr"/>
-            <a:endParaRPr lang="en-IN"/>
-          </a:p>
-        </p:txBody>
-      </p:sp>
-      <p:sp>
-        <p:nvSpPr>
-          <p:cNvPr id="32" name="TextBox 31">
-            <a:extLst>
-              <a:ext uri="{FF2B5EF4-FFF2-40B4-BE49-F238E27FC236}">
-                <a16:creationId xmlns:a16="http://schemas.microsoft.com/office/drawing/2014/main" id="{859326DF-AA37-406F-819A-458C92FF10CE}"/>
-              </a:ext>
-            </a:extLst>
-          </p:cNvPr>
-          <p:cNvSpPr txBox="1"/>
-          <p:nvPr/>
-        </p:nvSpPr>
-        <p:spPr>
-          <a:xfrm>
-            <a:off x="1526714" y="5640393"/>
-            <a:ext cx="2569238" cy="738664"/>
-          </a:xfrm>
-          <a:prstGeom prst="rect">
-            <a:avLst/>
-          </a:prstGeom>
-          <a:noFill/>
-        </p:spPr>
-        <p:txBody>
-          <a:bodyPr wrap="square" rtlCol="0">
-            <a:spAutoFit/>
-          </a:bodyPr>
-          <a:lstStyle/>
-          <a:p>
-            <a:pPr algn="ctr"/>
-            <a:r>
-              <a:rPr lang="en-IN" sz="1400" dirty="0">
-                <a:solidFill>
-                  <a:srgbClr val="C00000"/>
-                </a:solidFill>
-                <a:latin typeface="Albert Sans Medium" pitchFamily="2" charset="77"/>
-              </a:rPr>
-              <a:t>Are you predicting the outcome of your action before it even happens?</a:t>
-            </a:r>
-          </a:p>
-        </p:txBody>
-      </p:sp>
-      <p:sp>
-        <p:nvSpPr>
-          <p:cNvPr id="33" name="TextBox 32">
-            <a:extLst>
-              <a:ext uri="{FF2B5EF4-FFF2-40B4-BE49-F238E27FC236}">
-                <a16:creationId xmlns:a16="http://schemas.microsoft.com/office/drawing/2014/main" id="{4708EF2D-C129-E405-3005-44C4DFEA9960}"/>
-              </a:ext>
-            </a:extLst>
-          </p:cNvPr>
-          <p:cNvSpPr txBox="1"/>
-          <p:nvPr/>
-        </p:nvSpPr>
-        <p:spPr>
-          <a:xfrm>
-            <a:off x="3993515" y="607693"/>
-            <a:ext cx="1939955" cy="307777"/>
-          </a:xfrm>
-          <a:prstGeom prst="rect">
-            <a:avLst/>
-          </a:prstGeom>
-          <a:noFill/>
-        </p:spPr>
-        <p:txBody>
-          <a:bodyPr wrap="none" rtlCol="0">
-            <a:spAutoFit/>
-          </a:bodyPr>
-          <a:lstStyle/>
-          <a:p>
-            <a:r>
-              <a:rPr lang="en-IN" sz="1400" dirty="0">
-                <a:latin typeface="Albert Sans Medium" pitchFamily="2" charset="77"/>
-              </a:rPr>
-              <a:t>Sees the bulb turn on</a:t>
-            </a:r>
-          </a:p>
-        </p:txBody>
-      </p:sp>
-      <p:cxnSp>
-        <p:nvCxnSpPr>
-          <p:cNvPr id="35" name="Straight Arrow Connector 34">
-            <a:extLst>
-              <a:ext uri="{FF2B5EF4-FFF2-40B4-BE49-F238E27FC236}">
-                <a16:creationId xmlns:a16="http://schemas.microsoft.com/office/drawing/2014/main" id="{8CB50ACF-A379-B60A-6452-08C6B514194B}"/>
-              </a:ext>
-            </a:extLst>
-          </p:cNvPr>
-          <p:cNvCxnSpPr>
-            <a:cxnSpLocks/>
-          </p:cNvCxnSpPr>
-          <p:nvPr/>
-        </p:nvCxnSpPr>
-        <p:spPr>
-          <a:xfrm flipH="1">
-            <a:off x="3465671" y="950932"/>
-            <a:ext cx="3196697" cy="0"/>
-          </a:xfrm>
-          <a:prstGeom prst="straightConnector1">
-            <a:avLst/>
-          </a:prstGeom>
-          <a:ln w="76200">
-            <a:solidFill>
-              <a:schemeClr val="tx1"/>
-            </a:solidFill>
-            <a:tailEnd type="triangle"/>
-          </a:ln>
-        </p:spPr>
-        <p:style>
-          <a:lnRef idx="1">
-            <a:schemeClr val="dk1"/>
-          </a:lnRef>
-          <a:fillRef idx="0">
-            <a:schemeClr val="dk1"/>
-          </a:fillRef>
-          <a:effectRef idx="0">
-            <a:schemeClr val="dk1"/>
-          </a:effectRef>
-          <a:fontRef idx="minor">
-            <a:schemeClr val="tx1"/>
-          </a:fontRef>
-        </p:style>
-      </p:cxnSp>
-      <p:sp>
-        <p:nvSpPr>
-          <p:cNvPr id="38" name="TextBox 37">
-            <a:extLst>
-              <a:ext uri="{FF2B5EF4-FFF2-40B4-BE49-F238E27FC236}">
-                <a16:creationId xmlns:a16="http://schemas.microsoft.com/office/drawing/2014/main" id="{E765B61F-A64C-D16F-DE8C-D29AC28C0683}"/>
-              </a:ext>
-            </a:extLst>
-          </p:cNvPr>
-          <p:cNvSpPr txBox="1"/>
-          <p:nvPr/>
-        </p:nvSpPr>
-        <p:spPr>
-          <a:xfrm rot="16200000">
-            <a:off x="-456993" y="1296754"/>
-            <a:ext cx="1514797" cy="584775"/>
-          </a:xfrm>
-          <a:prstGeom prst="rect">
-            <a:avLst/>
-          </a:prstGeom>
-          <a:noFill/>
-        </p:spPr>
-        <p:txBody>
-          <a:bodyPr wrap="square" rtlCol="0">
-            <a:spAutoFit/>
-          </a:bodyPr>
-          <a:lstStyle/>
-          <a:p>
-            <a:pPr algn="ctr"/>
-            <a:r>
-              <a:rPr lang="en-US" sz="3200" b="1" dirty="0">
-                <a:solidFill>
-                  <a:schemeClr val="tx1">
-                    <a:lumMod val="75000"/>
-                    <a:lumOff val="25000"/>
-                  </a:schemeClr>
-                </a:solidFill>
-                <a:latin typeface="Albert Sans SemiBold" pitchFamily="2" charset="77"/>
-              </a:rPr>
-              <a:t>Action</a:t>
-            </a:r>
-          </a:p>
-        </p:txBody>
-      </p:sp>
-      <p:sp>
-        <p:nvSpPr>
-          <p:cNvPr id="39" name="TextBox 38">
-            <a:extLst>
-              <a:ext uri="{FF2B5EF4-FFF2-40B4-BE49-F238E27FC236}">
-                <a16:creationId xmlns:a16="http://schemas.microsoft.com/office/drawing/2014/main" id="{8E88752A-7BFA-E853-6A64-7E54FCA8E77A}"/>
-              </a:ext>
-            </a:extLst>
-          </p:cNvPr>
-          <p:cNvSpPr txBox="1"/>
-          <p:nvPr/>
-        </p:nvSpPr>
-        <p:spPr>
-          <a:xfrm rot="16200000">
-            <a:off x="-456993" y="4479823"/>
-            <a:ext cx="1514797" cy="584775"/>
-          </a:xfrm>
-          <a:prstGeom prst="rect">
-            <a:avLst/>
-          </a:prstGeom>
-          <a:noFill/>
-        </p:spPr>
-        <p:txBody>
-          <a:bodyPr wrap="square" rtlCol="0">
-            <a:spAutoFit/>
-          </a:bodyPr>
-          <a:lstStyle/>
-          <a:p>
-            <a:pPr algn="ctr"/>
-            <a:r>
-              <a:rPr lang="en-US" sz="3200" b="1" dirty="0">
-                <a:solidFill>
-                  <a:schemeClr val="tx1">
-                    <a:lumMod val="75000"/>
-                    <a:lumOff val="25000"/>
-                  </a:schemeClr>
-                </a:solidFill>
-                <a:latin typeface="Albert Sans SemiBold" pitchFamily="2" charset="77"/>
-              </a:rPr>
-              <a:t>EEG</a:t>
-            </a:r>
-          </a:p>
-        </p:txBody>
-      </p:sp>
-    </p:spTree>
-    <p:extLst>
-      <p:ext uri="{BB962C8B-B14F-4D97-AF65-F5344CB8AC3E}">
-        <p14:creationId xmlns:p14="http://schemas.microsoft.com/office/powerpoint/2010/main" val="3495713391"/>
-      </p:ext>
-    </p:extLst>
-  </p:cSld>
-  <p:clrMapOvr>
-    <a:masterClrMapping/>
-  </p:clrMapOvr>
-  <p:timing>
-    <p:tnLst>
-      <p:par>
-        <p:cTn id="1" dur="indefinite" restart="never" nodeType="tmRoot">
-          <p:childTnLst>
-            <p:seq concurrent="1" nextAc="seek">
-              <p:cTn id="2" dur="indefinite" nodeType="mainSeq">
-                <p:childTnLst>
-                  <p:par>
-                    <p:cTn id="3" fill="hold">
-                      <p:stCondLst>
-                        <p:cond delay="indefinite"/>
-                        <p:cond evt="onBegin" delay="0">
-                          <p:tn val="2"/>
-                        </p:cond>
-                      </p:stCondLst>
-                      <p:childTnLst>
-                        <p:par>
-                          <p:cTn id="4" fill="hold">
-                            <p:stCondLst>
-                              <p:cond delay="0"/>
-                            </p:stCondLst>
-                            <p:childTnLst>
-                              <p:par>
-                                <p:cTn id="5" presetID="8" presetClass="emph" presetSubtype="0" repeatCount="indefinite" fill="hold" nodeType="withEffect">
-                                  <p:stCondLst>
-                                    <p:cond delay="0"/>
-                                  </p:stCondLst>
-                                  <p:childTnLst>
-                                    <p:animRot by="21600000">
-                                      <p:cBhvr>
-                                        <p:cTn id="6" dur="2000" fill="hold"/>
-                                        <p:tgtEl>
-                                          <p:spTgt spid="23"/>
-                                        </p:tgtEl>
-                                        <p:attrNameLst>
-                                          <p:attrName>r</p:attrName>
-                                        </p:attrNameLst>
-                                      </p:cBhvr>
-                                    </p:animRot>
-                                  </p:childTnLst>
-                                </p:cTn>
-                              </p:par>
-                            </p:childTnLst>
-                          </p:cTn>
-                        </p:par>
-                      </p:childTnLst>
-                    </p:cTn>
-                  </p:par>
-                </p:childTnLst>
-              </p:cTn>
-              <p:prevCondLst>
-                <p:cond evt="onPrev" delay="0">
-                  <p:tgtEl>
-                    <p:sldTgt/>
-                  </p:tgtEl>
-                </p:cond>
-              </p:prevCondLst>
-              <p:nextCondLst>
-                <p:cond evt="onNext" delay="0">
-                  <p:tgtEl>
-                    <p:sldTgt/>
-                  </p:tgtEl>
-                </p:cond>
-              </p:nextCondLst>
-            </p:seq>
-          </p:childTnLst>
-        </p:cTn>
-      </p:par>
-    </p:tnLst>
-  </p:timing>
-</p:sld>
-</file>
-
-<file path=ppt/slides/slide2.xml><?xml version="1.0" encoding="utf-8"?>
-<p:sld xmlns:a="http://schemas.openxmlformats.org/drawingml/2006/main" xmlns:r="http://schemas.openxmlformats.org/officeDocument/2006/relationships" xmlns:p="http://schemas.openxmlformats.org/presentationml/2006/main">
-  <p:cSld>
-    <p:spTree>
-      <p:nvGrpSpPr>
-        <p:cNvPr id="1" name=""/>
-        <p:cNvGrpSpPr/>
-        <p:nvPr/>
-      </p:nvGrpSpPr>
-      <p:grpSpPr>
-        <a:xfrm>
-          <a:off x="0" y="0"/>
-          <a:ext cx="0" cy="0"/>
-          <a:chOff x="0" y="0"/>
-          <a:chExt cx="0" cy="0"/>
-        </a:xfrm>
-      </p:grpSpPr>
       <p:pic>
         <p:nvPicPr>
           <p:cNvPr id="42" name="Graphic 41">
@@ -4716,42 +3445,6 @@
           </a:prstGeom>
         </p:spPr>
       </p:pic>
-      <p:pic>
-        <p:nvPicPr>
-          <p:cNvPr id="8" name="Graphic 7">
-            <a:extLst>
-              <a:ext uri="{FF2B5EF4-FFF2-40B4-BE49-F238E27FC236}">
-                <a16:creationId xmlns:a16="http://schemas.microsoft.com/office/drawing/2014/main" id="{7499DC27-58A1-3AA6-C731-72F1F5846AAC}"/>
-              </a:ext>
-            </a:extLst>
-          </p:cNvPr>
-          <p:cNvPicPr>
-            <a:picLocks noChangeAspect="1"/>
-          </p:cNvPicPr>
-          <p:nvPr/>
-        </p:nvPicPr>
-        <p:blipFill>
-          <a:blip r:embed="rId5">
-            <a:extLst>
-              <a:ext uri="{96DAC541-7B7A-43D3-8B79-37D633B846F1}">
-                <asvg:svgBlip xmlns:asvg="http://schemas.microsoft.com/office/drawing/2016/SVG/main" r:embed="rId6"/>
-              </a:ext>
-            </a:extLst>
-          </a:blip>
-          <a:stretch>
-            <a:fillRect/>
-          </a:stretch>
-        </p:blipFill>
-        <p:spPr>
-          <a:xfrm>
-            <a:off x="2463102" y="-386668"/>
-            <a:ext cx="4217793" cy="4217793"/>
-          </a:xfrm>
-          <a:prstGeom prst="rect">
-            <a:avLst/>
-          </a:prstGeom>
-        </p:spPr>
-      </p:pic>
       <p:sp>
         <p:nvSpPr>
           <p:cNvPr id="15" name="Rectangle 14">
@@ -4828,7 +3521,7 @@
           </a:prstGeom>
           <a:solidFill>
             <a:schemeClr val="bg2">
-              <a:lumMod val="50000"/>
+              <a:lumMod val="25000"/>
             </a:schemeClr>
           </a:solidFill>
           <a:ln>
@@ -4887,7 +3580,7 @@
           </a:prstGeom>
           <a:solidFill>
             <a:schemeClr val="bg2">
-              <a:lumMod val="50000"/>
+              <a:lumMod val="25000"/>
             </a:schemeClr>
           </a:solidFill>
           <a:ln>
@@ -4946,7 +3639,7 @@
           </a:prstGeom>
           <a:solidFill>
             <a:schemeClr val="bg2">
-              <a:lumMod val="50000"/>
+              <a:lumMod val="25000"/>
             </a:schemeClr>
           </a:solidFill>
           <a:ln>
@@ -5007,7 +3700,7 @@
           <a:ln>
             <a:solidFill>
               <a:schemeClr val="bg2">
-                <a:lumMod val="50000"/>
+                <a:lumMod val="25000"/>
               </a:schemeClr>
             </a:solidFill>
           </a:ln>
@@ -5037,7 +3730,7 @@
               <a:rPr lang="en-US" dirty="0">
                 <a:solidFill>
                   <a:schemeClr val="bg2">
-                    <a:lumMod val="50000"/>
+                    <a:lumMod val="25000"/>
                   </a:schemeClr>
                 </a:solidFill>
                 <a:latin typeface="Helvetica" pitchFamily="2" charset="0"/>
@@ -5071,7 +3764,7 @@
           <a:ln>
             <a:solidFill>
               <a:schemeClr val="bg2">
-                <a:lumMod val="50000"/>
+                <a:lumMod val="25000"/>
               </a:schemeClr>
             </a:solidFill>
           </a:ln>
@@ -5101,7 +3794,7 @@
               <a:rPr lang="en-US" dirty="0">
                 <a:solidFill>
                   <a:schemeClr val="bg2">
-                    <a:lumMod val="50000"/>
+                    <a:lumMod val="25000"/>
                   </a:schemeClr>
                 </a:solidFill>
                 <a:latin typeface="Helvetica" pitchFamily="2" charset="0"/>
@@ -5125,7 +3818,7 @@
         </p:nvSpPr>
         <p:spPr>
           <a:xfrm>
-            <a:off x="2918035" y="5158824"/>
+            <a:off x="2918031" y="5197700"/>
             <a:ext cx="3307924" cy="449662"/>
           </a:xfrm>
           <a:prstGeom prst="rect">
@@ -5167,7 +3860,7 @@
           <a:p>
             <a:pPr algn="ctr"/>
             <a:r>
-              <a:rPr lang="en-US" dirty="0">
+              <a:rPr lang="en-US" b="1" dirty="0">
                 <a:solidFill>
                   <a:schemeClr val="accent6">
                     <a:lumMod val="75000"/>
@@ -5194,12 +3887,12 @@
         </p:nvSpPr>
         <p:spPr>
           <a:xfrm>
-            <a:off x="422026" y="2277332"/>
-            <a:ext cx="8299939" cy="871193"/>
+            <a:off x="422025" y="2304633"/>
+            <a:ext cx="8299939" cy="846530"/>
           </a:xfrm>
           <a:prstGeom prst="trapezoid">
             <a:avLst>
-              <a:gd name="adj" fmla="val 217528"/>
+              <a:gd name="adj" fmla="val 350977"/>
             </a:avLst>
           </a:prstGeom>
           <a:gradFill>
@@ -5367,9 +4060,8 @@
           </a:prstGeom>
           <a:ln w="25400">
             <a:solidFill>
-              <a:schemeClr val="tx1">
-                <a:lumMod val="50000"/>
-                <a:lumOff val="50000"/>
+              <a:schemeClr val="bg2">
+                <a:lumMod val="25000"/>
               </a:schemeClr>
             </a:solidFill>
             <a:prstDash val="sysDash"/>
@@ -5416,9 +4108,8 @@
           </a:prstGeom>
           <a:ln w="25400">
             <a:solidFill>
-              <a:schemeClr val="tx1">
-                <a:lumMod val="50000"/>
-                <a:lumOff val="50000"/>
+              <a:schemeClr val="bg2">
+                <a:lumMod val="25000"/>
               </a:schemeClr>
             </a:solidFill>
             <a:prstDash val="sysDash"/>
@@ -5461,11 +4152,10 @@
           <a:prstGeom prst="line">
             <a:avLst/>
           </a:prstGeom>
-          <a:ln w="38100">
+          <a:ln w="57150">
             <a:solidFill>
-              <a:schemeClr val="tx1">
-                <a:lumMod val="50000"/>
-                <a:lumOff val="50000"/>
+              <a:schemeClr val="bg2">
+                <a:lumMod val="25000"/>
               </a:schemeClr>
             </a:solidFill>
             <a:prstDash val="solid"/>
@@ -5509,11 +4199,10 @@
           <a:prstGeom prst="line">
             <a:avLst/>
           </a:prstGeom>
-          <a:ln w="38100">
+          <a:ln w="57150">
             <a:solidFill>
-              <a:schemeClr val="tx1">
-                <a:lumMod val="50000"/>
-                <a:lumOff val="50000"/>
+              <a:schemeClr val="bg2">
+                <a:lumMod val="25000"/>
               </a:schemeClr>
             </a:solidFill>
             <a:prstDash val="solid"/>
@@ -5550,7 +4239,7 @@
         </p:nvSpPr>
         <p:spPr>
           <a:xfrm>
-            <a:off x="2950442" y="5696095"/>
+            <a:off x="2950441" y="5734628"/>
             <a:ext cx="3243103" cy="449662"/>
           </a:xfrm>
           <a:prstGeom prst="rect">
@@ -5591,11 +4280,47 @@
                 </a:solidFill>
                 <a:latin typeface="Helvetica" pitchFamily="2" charset="0"/>
               </a:rPr>
-              <a:t>Machine Learning with EEG</a:t>
-            </a:r>
-          </a:p>
-        </p:txBody>
-      </p:sp>
+              <a:t>Evaluating using ML and EEG on a Libet Clock Paradigm</a:t>
+            </a:r>
+          </a:p>
+        </p:txBody>
+      </p:sp>
+      <p:pic>
+        <p:nvPicPr>
+          <p:cNvPr id="8" name="Graphic 7">
+            <a:extLst>
+              <a:ext uri="{FF2B5EF4-FFF2-40B4-BE49-F238E27FC236}">
+                <a16:creationId xmlns:a16="http://schemas.microsoft.com/office/drawing/2014/main" id="{7499DC27-58A1-3AA6-C731-72F1F5846AAC}"/>
+              </a:ext>
+            </a:extLst>
+          </p:cNvPr>
+          <p:cNvPicPr>
+            <a:picLocks noChangeAspect="1"/>
+          </p:cNvPicPr>
+          <p:nvPr/>
+        </p:nvPicPr>
+        <p:blipFill>
+          <a:blip r:embed="rId5">
+            <a:extLst>
+              <a:ext uri="{96DAC541-7B7A-43D3-8B79-37D633B846F1}">
+                <asvg:svgBlip xmlns:asvg="http://schemas.microsoft.com/office/drawing/2016/SVG/main" r:embed="rId6"/>
+              </a:ext>
+            </a:extLst>
+          </a:blip>
+          <a:stretch>
+            <a:fillRect/>
+          </a:stretch>
+        </p:blipFill>
+        <p:spPr>
+          <a:xfrm>
+            <a:off x="2588648" y="-386668"/>
+            <a:ext cx="3966703" cy="3966703"/>
+          </a:xfrm>
+          <a:prstGeom prst="rect">
+            <a:avLst/>
+          </a:prstGeom>
+        </p:spPr>
+      </p:pic>
     </p:spTree>
     <p:extLst>
       <p:ext uri="{BB962C8B-B14F-4D97-AF65-F5344CB8AC3E}">
